--- a/deck/fuel_section01.pptx
+++ b/deck/fuel_section01.pptx
@@ -14,9 +14,11 @@
     <p:sldId id="262" r:id="rId8"/>
     <p:sldId id="263" r:id="rId9"/>
     <p:sldId id="264" r:id="rId10"/>
+    <p:sldId id="265" r:id="rId11"/>
+    <p:sldId id="266" r:id="rId12"/>
   </p:sldIdLst>
   <p:notesMasterIdLst>
-    <p:notesMasterId r:id="rId11"/>
+    <p:notesMasterId r:id="rId13"/>
   </p:notesMasterIdLst>
   <p:sldSz cx="12192000" cy="6858000"/>
   <p:notesSz cx="6858000" cy="12192000"/>
@@ -1181,6 +1183,182 @@
             <a:fld id="{F7021451-1387-4CA6-816F-3879F97B5CBC}" type="slidenum">
               <a:rPr lang="en-US"/>
               <a:t>1</a:t>
+            </a:fld>
+            <a:endParaRPr lang="en-US"/>
+          </a:p>
+        </p:txBody>
+      </p:sp>
+    </p:spTree>
+    <p:extLst>
+      <p:ext uri="{BB962C8B-B14F-4D97-AF65-F5344CB8AC3E}">
+        <p14:creationId xmlns:p14="http://schemas.microsoft.com/office/powerpoint/2010/main" val="1024086991"/>
+      </p:ext>
+    </p:extLst>
+  </p:cSld>
+  <p:clrMapOvr>
+    <a:masterClrMapping/>
+  </p:clrMapOvr>
+</p:notes>
+</file>
+
+<file path=ppt/notesSlides/notesSlide10.xml><?xml version="1.0" encoding="utf-8"?>
+<p:notes xmlns:a="http://schemas.openxmlformats.org/drawingml/2006/main" xmlns:r="http://schemas.openxmlformats.org/officeDocument/2006/relationships" xmlns:p="http://schemas.openxmlformats.org/presentationml/2006/main">
+  <p:cSld>
+    <p:spTree>
+      <p:nvGrpSpPr>
+        <p:cNvPr id="1" name=""/>
+        <p:cNvGrpSpPr/>
+        <p:nvPr/>
+      </p:nvGrpSpPr>
+      <p:grpSpPr>
+        <a:xfrm>
+          <a:off x="0" y="0"/>
+          <a:ext cx="0" cy="0"/>
+          <a:chOff x="0" y="0"/>
+          <a:chExt cx="0" cy="0"/>
+        </a:xfrm>
+      </p:grpSpPr>
+      <p:sp>
+        <p:nvSpPr>
+          <p:cNvPr id="2" name="Slide Image Placeholder 1"/>
+          <p:cNvSpPr>
+            <a:spLocks noGrp="1" noRot="1" noChangeAspect="1"/>
+          </p:cNvSpPr>
+          <p:nvPr>
+            <p:ph type="sldImg"/>
+          </p:nvPr>
+        </p:nvSpPr>
+        <p:spPr/>
+      </p:sp>
+      <p:sp>
+        <p:nvSpPr>
+          <p:cNvPr id="3" name="Notes Placeholder 2"/>
+          <p:cNvSpPr>
+            <a:spLocks noGrp="1"/>
+          </p:cNvSpPr>
+          <p:nvPr>
+            <p:ph type="body" idx="1"/>
+          </p:nvPr>
+        </p:nvSpPr>
+        <p:spPr/>
+        <p:txBody>
+          <a:bodyPr/>
+          <a:lstStyle/>
+          <a:p>
+            <a:r>
+              <a:rPr lang="en-US" dirty="0"/>
+              <a:t>여기서 관점을 바꿉니다. 지금까지 본 문제들은 흩어진 개별 사건이 아니라 하나의 계통에서 일어나는 일입니다. Well-to-Wake는 추출·정제·수송까지 포함하는 규제 보고의 틀입니다. 반면 Tank-to-Wake는 연료가 우리 탱크에 들어온 순간부터 배기가 굴뚝을 빠져나갈 때까지 — 즉 본선이 실제로 손댈 수 있는 구간입니다. Section 01에서 본 데이터가 이 세 단계에 각각 어디에 해당하는지 카드 하단에 표시했습니다.</a:t>
+            </a:r>
+            <a:endParaRPr lang="en-US" dirty="0"/>
+          </a:p>
+        </p:txBody>
+      </p:sp>
+      <p:sp>
+        <p:nvSpPr>
+          <p:cNvPr id="4" name="Slide Number Placeholder 3"/>
+          <p:cNvSpPr>
+            <a:spLocks noGrp="1"/>
+          </p:cNvSpPr>
+          <p:nvPr>
+            <p:ph type="sldNum" sz="quarter" idx="10"/>
+          </p:nvPr>
+        </p:nvSpPr>
+        <p:spPr/>
+        <p:txBody>
+          <a:bodyPr/>
+          <a:lstStyle/>
+          <a:p>
+            <a:fld id="{F7021451-1387-4CA6-816F-3879F97B5CBC}" type="slidenum">
+              <a:rPr lang="en-US"/>
+              <a:t>10</a:t>
+            </a:fld>
+            <a:endParaRPr lang="en-US"/>
+          </a:p>
+        </p:txBody>
+      </p:sp>
+    </p:spTree>
+    <p:extLst>
+      <p:ext uri="{BB962C8B-B14F-4D97-AF65-F5344CB8AC3E}">
+        <p14:creationId xmlns:p14="http://schemas.microsoft.com/office/powerpoint/2010/main" val="1024086991"/>
+      </p:ext>
+    </p:extLst>
+  </p:cSld>
+  <p:clrMapOvr>
+    <a:masterClrMapping/>
+  </p:clrMapOvr>
+</p:notes>
+</file>
+
+<file path=ppt/notesSlides/notesSlide11.xml><?xml version="1.0" encoding="utf-8"?>
+<p:notes xmlns:a="http://schemas.openxmlformats.org/drawingml/2006/main" xmlns:r="http://schemas.openxmlformats.org/officeDocument/2006/relationships" xmlns:p="http://schemas.openxmlformats.org/presentationml/2006/main">
+  <p:cSld>
+    <p:spTree>
+      <p:nvGrpSpPr>
+        <p:cNvPr id="1" name=""/>
+        <p:cNvGrpSpPr/>
+        <p:nvPr/>
+      </p:nvGrpSpPr>
+      <p:grpSpPr>
+        <a:xfrm>
+          <a:off x="0" y="0"/>
+          <a:ext cx="0" cy="0"/>
+          <a:chOff x="0" y="0"/>
+          <a:chExt cx="0" cy="0"/>
+        </a:xfrm>
+      </p:grpSpPr>
+      <p:sp>
+        <p:nvSpPr>
+          <p:cNvPr id="2" name="Slide Image Placeholder 1"/>
+          <p:cNvSpPr>
+            <a:spLocks noGrp="1" noRot="1" noChangeAspect="1"/>
+          </p:cNvSpPr>
+          <p:nvPr>
+            <p:ph type="sldImg"/>
+          </p:nvPr>
+        </p:nvSpPr>
+        <p:spPr/>
+      </p:sp>
+      <p:sp>
+        <p:nvSpPr>
+          <p:cNvPr id="3" name="Notes Placeholder 2"/>
+          <p:cNvSpPr>
+            <a:spLocks noGrp="1"/>
+          </p:cNvSpPr>
+          <p:nvPr>
+            <p:ph type="body" idx="1"/>
+          </p:nvPr>
+        </p:nvSpPr>
+        <p:spPr/>
+        <p:txBody>
+          <a:bodyPr/>
+          <a:lstStyle/>
+          <a:p>
+            <a:r>
+              <a:rPr lang="en-US" dirty="0"/>
+              <a:t>Section 01의 마지막 장입니다. 핵심은 손실이 단계마다 누적된다는 점입니다. 저장 중 열화로 슬러지가 되면 그 연료는 엔진에 도달조차 못 합니다. 연소가 나쁘면 매연이 열회수면에 쌓여 이후 모든 사이클의 효율을 떨어뜨립니다. 그래서 한 지점만 개선하는 것으로는 부족하고, Tank-to-Wake 전체를 하나로 관리해야 합니다. Section 02부터 각 단계를 순서대로 다룹니다.</a:t>
+            </a:r>
+            <a:endParaRPr lang="en-US" dirty="0"/>
+          </a:p>
+        </p:txBody>
+      </p:sp>
+      <p:sp>
+        <p:nvSpPr>
+          <p:cNvPr id="4" name="Slide Number Placeholder 3"/>
+          <p:cNvSpPr>
+            <a:spLocks noGrp="1"/>
+          </p:cNvSpPr>
+          <p:nvPr>
+            <p:ph type="sldNum" sz="quarter" idx="10"/>
+          </p:nvPr>
+        </p:nvSpPr>
+        <p:spPr/>
+        <p:txBody>
+          <a:bodyPr/>
+          <a:lstStyle/>
+          <a:p>
+            <a:fld id="{F7021451-1387-4CA6-816F-3879F97B5CBC}" type="slidenum">
+              <a:rPr lang="en-US"/>
+              <a:t>11</a:t>
             </a:fld>
             <a:endParaRPr lang="en-US"/>
           </a:p>
@@ -2857,6 +3035,3517 @@
               <a:t>01</a:t>
             </a:r>
             <a:endParaRPr lang="en-US" sz="950" dirty="0"/>
+          </a:p>
+        </p:txBody>
+      </p:sp>
+    </p:spTree>
+  </p:cSld>
+  <p:clrMapOvr>
+    <a:masterClrMapping/>
+  </p:clrMapOvr>
+</p:sld>
+</file>
+
+<file path=ppt/slides/slide10.xml><?xml version="1.0" encoding="utf-8"?>
+<p:sld xmlns:a="http://schemas.openxmlformats.org/drawingml/2006/main" xmlns:r="http://schemas.openxmlformats.org/officeDocument/2006/relationships" xmlns:p="http://schemas.openxmlformats.org/presentationml/2006/main">
+  <p:cSld name="Slide 10">
+    <p:bg>
+      <p:bgPr>
+        <a:solidFill>
+          <a:srgbClr val="F4F6FB"/>
+        </a:solidFill>
+      </p:bgPr>
+    </p:bg>
+    <p:spTree>
+      <p:nvGrpSpPr>
+        <p:cNvPr id="1" name=""/>
+        <p:cNvGrpSpPr/>
+        <p:nvPr/>
+      </p:nvGrpSpPr>
+      <p:grpSpPr>
+        <a:xfrm>
+          <a:off x="0" y="0"/>
+          <a:ext cx="0" cy="0"/>
+          <a:chOff x="0" y="0"/>
+          <a:chExt cx="0" cy="0"/>
+        </a:xfrm>
+      </p:grpSpPr>
+      <p:sp>
+        <p:nvSpPr>
+          <p:cNvPr id="2" name="Text 0"/>
+          <p:cNvSpPr/>
+          <p:nvPr/>
+        </p:nvSpPr>
+        <p:spPr>
+          <a:xfrm>
+            <a:off x="566928" y="402336"/>
+            <a:ext cx="7315200" cy="256032"/>
+          </a:xfrm>
+          <a:prstGeom prst="rect">
+            <a:avLst/>
+          </a:prstGeom>
+          <a:noFill/>
+          <a:ln/>
+        </p:spPr>
+        <p:txBody>
+          <a:bodyPr wrap="square" lIns="0" tIns="0" rIns="0" bIns="0" rtlCol="0" anchor="ctr"/>
+          <a:lstStyle/>
+          <a:p>
+            <a:pPr algn="l" indent="0" marL="0">
+              <a:buNone/>
+            </a:pPr>
+            <a:r>
+              <a:rPr lang="en-US" sz="1150" b="1" spc="240" kern="0" dirty="0">
+                <a:solidFill>
+                  <a:srgbClr val="E17B34"/>
+                </a:solidFill>
+                <a:latin typeface="맑은 고딕" pitchFamily="34" charset="0"/>
+                <a:ea typeface="맑은 고딕" pitchFamily="34" charset="-122"/>
+                <a:cs typeface="맑은 고딕" pitchFamily="34" charset="-120"/>
+              </a:rPr>
+              <a:t>09   프레임</a:t>
+            </a:r>
+            <a:endParaRPr lang="en-US" sz="1150" dirty="0"/>
+          </a:p>
+        </p:txBody>
+      </p:sp>
+      <p:sp>
+        <p:nvSpPr>
+          <p:cNvPr id="3" name="Text 1"/>
+          <p:cNvSpPr/>
+          <p:nvPr/>
+        </p:nvSpPr>
+        <p:spPr>
+          <a:xfrm>
+            <a:off x="566928" y="694944"/>
+            <a:ext cx="11057839" cy="713232"/>
+          </a:xfrm>
+          <a:prstGeom prst="rect">
+            <a:avLst/>
+          </a:prstGeom>
+          <a:noFill/>
+          <a:ln/>
+        </p:spPr>
+        <p:txBody>
+          <a:bodyPr wrap="square" lIns="0" tIns="0" rIns="0" bIns="0" rtlCol="0" anchor="ctr"/>
+          <a:lstStyle/>
+          <a:p>
+            <a:pPr algn="l" indent="0" marL="0">
+              <a:buNone/>
+            </a:pPr>
+            <a:r>
+              <a:rPr lang="en-US" sz="3600" dirty="0">
+                <a:solidFill>
+                  <a:srgbClr val="1B3A5C"/>
+                </a:solidFill>
+                <a:latin typeface="바탕" pitchFamily="34" charset="0"/>
+                <a:ea typeface="바탕" pitchFamily="34" charset="-122"/>
+                <a:cs typeface="바탕" pitchFamily="34" charset="-120"/>
+              </a:rPr>
+              <a:t>Tank to Wake — 탱크에서 배기까지</a:t>
+            </a:r>
+            <a:endParaRPr lang="en-US" sz="3600" dirty="0"/>
+          </a:p>
+        </p:txBody>
+      </p:sp>
+      <p:sp>
+        <p:nvSpPr>
+          <p:cNvPr id="4" name="Text 2"/>
+          <p:cNvSpPr/>
+          <p:nvPr/>
+        </p:nvSpPr>
+        <p:spPr>
+          <a:xfrm>
+            <a:off x="566928" y="6419088"/>
+            <a:ext cx="8778240" cy="274320"/>
+          </a:xfrm>
+          <a:prstGeom prst="rect">
+            <a:avLst/>
+          </a:prstGeom>
+          <a:noFill/>
+          <a:ln/>
+        </p:spPr>
+        <p:txBody>
+          <a:bodyPr wrap="square" lIns="0" tIns="0" rIns="0" bIns="0" rtlCol="0" anchor="ctr"/>
+          <a:lstStyle/>
+          <a:p>
+            <a:pPr indent="0" marL="0">
+              <a:buNone/>
+            </a:pPr>
+            <a:r>
+              <a:rPr lang="en-US" sz="850" dirty="0">
+                <a:solidFill>
+                  <a:srgbClr val="8A94A6"/>
+                </a:solidFill>
+                <a:latin typeface="맑은 고딕" pitchFamily="34" charset="0"/>
+                <a:ea typeface="맑은 고딕" pitchFamily="34" charset="-122"/>
+                <a:cs typeface="맑은 고딕" pitchFamily="34" charset="-120"/>
+              </a:rPr>
+              <a:t>Classified as Internal - This content is proprietary information intended for employees and partners only.</a:t>
+            </a:r>
+            <a:endParaRPr lang="en-US" sz="850" dirty="0"/>
+          </a:p>
+        </p:txBody>
+      </p:sp>
+      <p:sp>
+        <p:nvSpPr>
+          <p:cNvPr id="5" name="Text 3"/>
+          <p:cNvSpPr/>
+          <p:nvPr/>
+        </p:nvSpPr>
+        <p:spPr>
+          <a:xfrm>
+            <a:off x="11155680" y="6419088"/>
+            <a:ext cx="502920" cy="274320"/>
+          </a:xfrm>
+          <a:prstGeom prst="rect">
+            <a:avLst/>
+          </a:prstGeom>
+          <a:noFill/>
+          <a:ln/>
+        </p:spPr>
+        <p:txBody>
+          <a:bodyPr wrap="square" lIns="0" tIns="0" rIns="0" bIns="0" rtlCol="0" anchor="ctr"/>
+          <a:lstStyle/>
+          <a:p>
+            <a:pPr algn="r" indent="0" marL="0">
+              <a:buNone/>
+            </a:pPr>
+            <a:r>
+              <a:rPr lang="en-US" sz="950" dirty="0">
+                <a:solidFill>
+                  <a:srgbClr val="8A94A6"/>
+                </a:solidFill>
+                <a:latin typeface="맑은 고딕" pitchFamily="34" charset="0"/>
+                <a:ea typeface="맑은 고딕" pitchFamily="34" charset="-122"/>
+                <a:cs typeface="맑은 고딕" pitchFamily="34" charset="-120"/>
+              </a:rPr>
+              <a:t>10</a:t>
+            </a:r>
+            <a:endParaRPr lang="en-US" sz="950" dirty="0"/>
+          </a:p>
+        </p:txBody>
+      </p:sp>
+      <p:sp>
+        <p:nvSpPr>
+          <p:cNvPr id="6" name="Shape 4"/>
+          <p:cNvSpPr/>
+          <p:nvPr/>
+        </p:nvSpPr>
+        <p:spPr>
+          <a:xfrm>
+            <a:off x="566928" y="1591056"/>
+            <a:ext cx="3429914" cy="3017520"/>
+          </a:xfrm>
+          <a:prstGeom prst="roundRect">
+            <a:avLst>
+              <a:gd name="adj" fmla="val 4242"/>
+            </a:avLst>
+          </a:prstGeom>
+          <a:solidFill>
+            <a:srgbClr val="FFFFFF"/>
+          </a:solidFill>
+          <a:ln w="9525">
+            <a:solidFill>
+              <a:srgbClr val="EDF1F8"/>
+            </a:solidFill>
+            <a:prstDash val="solid"/>
+          </a:ln>
+          <a:effectLst>
+            <a:outerShdw sx="100000" sy="100000" kx="0" ky="0" algn="bl" rotWithShape="0" blurRad="127000" dist="25400" dir="5400000">
+              <a:srgbClr val="9BAAC4">
+                <a:alpha val="22000"/>
+              </a:srgbClr>
+            </a:outerShdw>
+          </a:effectLst>
+        </p:spPr>
+      </p:sp>
+      <p:sp>
+        <p:nvSpPr>
+          <p:cNvPr id="7" name="Text 5"/>
+          <p:cNvSpPr/>
+          <p:nvPr/>
+        </p:nvSpPr>
+        <p:spPr>
+          <a:xfrm>
+            <a:off x="804672" y="1792224"/>
+            <a:ext cx="2954426" cy="219456"/>
+          </a:xfrm>
+          <a:prstGeom prst="rect">
+            <a:avLst/>
+          </a:prstGeom>
+          <a:noFill/>
+          <a:ln/>
+        </p:spPr>
+        <p:txBody>
+          <a:bodyPr wrap="square" lIns="0" tIns="0" rIns="0" bIns="0" rtlCol="0" anchor="ctr"/>
+          <a:lstStyle/>
+          <a:p>
+            <a:pPr indent="0" marL="0">
+              <a:buNone/>
+            </a:pPr>
+            <a:r>
+              <a:rPr lang="en-US" sz="950" b="1" spc="180" kern="0" dirty="0">
+                <a:solidFill>
+                  <a:srgbClr val="2E5C8A"/>
+                </a:solidFill>
+                <a:latin typeface="맑은 고딕" pitchFamily="34" charset="0"/>
+                <a:ea typeface="맑은 고딕" pitchFamily="34" charset="-122"/>
+                <a:cs typeface="맑은 고딕" pitchFamily="34" charset="-120"/>
+              </a:rPr>
+              <a:t>PRE-COMBUSTION</a:t>
+            </a:r>
+            <a:endParaRPr lang="en-US" sz="950" dirty="0"/>
+          </a:p>
+        </p:txBody>
+      </p:sp>
+      <p:sp>
+        <p:nvSpPr>
+          <p:cNvPr id="8" name="Text 6"/>
+          <p:cNvSpPr/>
+          <p:nvPr/>
+        </p:nvSpPr>
+        <p:spPr>
+          <a:xfrm>
+            <a:off x="804672" y="2011680"/>
+            <a:ext cx="2954426" cy="384048"/>
+          </a:xfrm>
+          <a:prstGeom prst="rect">
+            <a:avLst/>
+          </a:prstGeom>
+          <a:noFill/>
+          <a:ln/>
+        </p:spPr>
+        <p:txBody>
+          <a:bodyPr wrap="square" lIns="0" tIns="0" rIns="0" bIns="0" rtlCol="0" anchor="ctr"/>
+          <a:lstStyle/>
+          <a:p>
+            <a:pPr indent="0" marL="0">
+              <a:buNone/>
+            </a:pPr>
+            <a:r>
+              <a:rPr lang="en-US" sz="2200" dirty="0">
+                <a:solidFill>
+                  <a:srgbClr val="1B3A5C"/>
+                </a:solidFill>
+                <a:latin typeface="바탕" pitchFamily="34" charset="0"/>
+                <a:ea typeface="바탕" pitchFamily="34" charset="-122"/>
+                <a:cs typeface="바탕" pitchFamily="34" charset="-120"/>
+              </a:rPr>
+              <a:t>연소 전</a:t>
+            </a:r>
+            <a:endParaRPr lang="en-US" sz="2200" dirty="0"/>
+          </a:p>
+        </p:txBody>
+      </p:sp>
+      <p:sp>
+        <p:nvSpPr>
+          <p:cNvPr id="9" name="Text 7"/>
+          <p:cNvSpPr/>
+          <p:nvPr/>
+        </p:nvSpPr>
+        <p:spPr>
+          <a:xfrm>
+            <a:off x="804672" y="2414016"/>
+            <a:ext cx="2954426" cy="256032"/>
+          </a:xfrm>
+          <a:prstGeom prst="rect">
+            <a:avLst/>
+          </a:prstGeom>
+          <a:noFill/>
+          <a:ln/>
+        </p:spPr>
+        <p:txBody>
+          <a:bodyPr wrap="square" lIns="0" tIns="0" rIns="0" bIns="0" rtlCol="0" anchor="ctr"/>
+          <a:lstStyle/>
+          <a:p>
+            <a:pPr indent="0" marL="0">
+              <a:buNone/>
+            </a:pPr>
+            <a:r>
+              <a:rPr lang="en-US" sz="1100" b="1" dirty="0">
+                <a:solidFill>
+                  <a:srgbClr val="2E5C8A"/>
+                </a:solidFill>
+                <a:latin typeface="맑은 고딕" pitchFamily="34" charset="0"/>
+                <a:ea typeface="맑은 고딕" pitchFamily="34" charset="-122"/>
+                <a:cs typeface="맑은 고딕" pitchFamily="34" charset="-120"/>
+              </a:rPr>
+              <a:t>저장 · 안정성 · 호환성</a:t>
+            </a:r>
+            <a:endParaRPr lang="en-US" sz="1100" dirty="0"/>
+          </a:p>
+        </p:txBody>
+      </p:sp>
+      <p:sp>
+        <p:nvSpPr>
+          <p:cNvPr id="10" name="Shape 8"/>
+          <p:cNvSpPr/>
+          <p:nvPr/>
+        </p:nvSpPr>
+        <p:spPr>
+          <a:xfrm>
+            <a:off x="822960" y="2852928"/>
+            <a:ext cx="109728" cy="109728"/>
+          </a:xfrm>
+          <a:prstGeom prst="roundRect">
+            <a:avLst>
+              <a:gd name="adj" fmla="val 50000"/>
+            </a:avLst>
+          </a:prstGeom>
+          <a:solidFill>
+            <a:srgbClr val="2E5C8A"/>
+          </a:solidFill>
+          <a:ln w="12700">
+            <a:solidFill>
+              <a:srgbClr val="333333"/>
+            </a:solidFill>
+            <a:prstDash val="solid"/>
+          </a:ln>
+        </p:spPr>
+      </p:sp>
+      <p:sp>
+        <p:nvSpPr>
+          <p:cNvPr id="11" name="Text 9"/>
+          <p:cNvSpPr/>
+          <p:nvPr/>
+        </p:nvSpPr>
+        <p:spPr>
+          <a:xfrm>
+            <a:off x="1042416" y="2761488"/>
+            <a:ext cx="2716682" cy="310896"/>
+          </a:xfrm>
+          <a:prstGeom prst="rect">
+            <a:avLst/>
+          </a:prstGeom>
+          <a:noFill/>
+          <a:ln/>
+        </p:spPr>
+        <p:txBody>
+          <a:bodyPr wrap="square" lIns="0" tIns="0" rIns="0" bIns="0" rtlCol="0" anchor="ctr"/>
+          <a:lstStyle/>
+          <a:p>
+            <a:pPr indent="0" marL="0">
+              <a:buNone/>
+            </a:pPr>
+            <a:r>
+              <a:rPr lang="en-US" sz="1050" dirty="0">
+                <a:solidFill>
+                  <a:srgbClr val="3D4A5C"/>
+                </a:solidFill>
+                <a:latin typeface="맑은 고딕" pitchFamily="34" charset="0"/>
+                <a:ea typeface="맑은 고딕" pitchFamily="34" charset="-122"/>
+                <a:cs typeface="맑은 고딕" pitchFamily="34" charset="-120"/>
+              </a:rPr>
+              <a:t>연료가 엔진에 도달하기 전 단계</a:t>
+            </a:r>
+            <a:endParaRPr lang="en-US" sz="1050" dirty="0"/>
+          </a:p>
+        </p:txBody>
+      </p:sp>
+      <p:sp>
+        <p:nvSpPr>
+          <p:cNvPr id="12" name="Shape 10"/>
+          <p:cNvSpPr/>
+          <p:nvPr/>
+        </p:nvSpPr>
+        <p:spPr>
+          <a:xfrm>
+            <a:off x="822960" y="3218688"/>
+            <a:ext cx="109728" cy="109728"/>
+          </a:xfrm>
+          <a:prstGeom prst="roundRect">
+            <a:avLst>
+              <a:gd name="adj" fmla="val 50000"/>
+            </a:avLst>
+          </a:prstGeom>
+          <a:solidFill>
+            <a:srgbClr val="2E5C8A"/>
+          </a:solidFill>
+          <a:ln w="12700">
+            <a:solidFill>
+              <a:srgbClr val="333333"/>
+            </a:solidFill>
+            <a:prstDash val="solid"/>
+          </a:ln>
+        </p:spPr>
+      </p:sp>
+      <p:sp>
+        <p:nvSpPr>
+          <p:cNvPr id="13" name="Text 11"/>
+          <p:cNvSpPr/>
+          <p:nvPr/>
+        </p:nvSpPr>
+        <p:spPr>
+          <a:xfrm>
+            <a:off x="1042416" y="3127248"/>
+            <a:ext cx="2716682" cy="310896"/>
+          </a:xfrm>
+          <a:prstGeom prst="rect">
+            <a:avLst/>
+          </a:prstGeom>
+          <a:noFill/>
+          <a:ln/>
+        </p:spPr>
+        <p:txBody>
+          <a:bodyPr wrap="square" lIns="0" tIns="0" rIns="0" bIns="0" rtlCol="0" anchor="ctr"/>
+          <a:lstStyle/>
+          <a:p>
+            <a:pPr indent="0" marL="0">
+              <a:buNone/>
+            </a:pPr>
+            <a:r>
+              <a:rPr lang="en-US" sz="1050" dirty="0">
+                <a:solidFill>
+                  <a:srgbClr val="3D4A5C"/>
+                </a:solidFill>
+                <a:latin typeface="맑은 고딕" pitchFamily="34" charset="0"/>
+                <a:ea typeface="맑은 고딕" pitchFamily="34" charset="-122"/>
+                <a:cs typeface="맑은 고딕" pitchFamily="34" charset="-120"/>
+              </a:rPr>
+              <a:t>슬러지로 빠져나가는 손실</a:t>
+            </a:r>
+            <a:endParaRPr lang="en-US" sz="1050" dirty="0"/>
+          </a:p>
+        </p:txBody>
+      </p:sp>
+      <p:sp>
+        <p:nvSpPr>
+          <p:cNvPr id="14" name="Shape 12"/>
+          <p:cNvSpPr/>
+          <p:nvPr/>
+        </p:nvSpPr>
+        <p:spPr>
+          <a:xfrm>
+            <a:off x="822960" y="3584448"/>
+            <a:ext cx="109728" cy="109728"/>
+          </a:xfrm>
+          <a:prstGeom prst="roundRect">
+            <a:avLst>
+              <a:gd name="adj" fmla="val 50000"/>
+            </a:avLst>
+          </a:prstGeom>
+          <a:solidFill>
+            <a:srgbClr val="2E5C8A"/>
+          </a:solidFill>
+          <a:ln w="12700">
+            <a:solidFill>
+              <a:srgbClr val="333333"/>
+            </a:solidFill>
+            <a:prstDash val="solid"/>
+          </a:ln>
+        </p:spPr>
+      </p:sp>
+      <p:sp>
+        <p:nvSpPr>
+          <p:cNvPr id="15" name="Text 13"/>
+          <p:cNvSpPr/>
+          <p:nvPr/>
+        </p:nvSpPr>
+        <p:spPr>
+          <a:xfrm>
+            <a:off x="1042416" y="3493008"/>
+            <a:ext cx="2716682" cy="310896"/>
+          </a:xfrm>
+          <a:prstGeom prst="rect">
+            <a:avLst/>
+          </a:prstGeom>
+          <a:noFill/>
+          <a:ln/>
+        </p:spPr>
+        <p:txBody>
+          <a:bodyPr wrap="square" lIns="0" tIns="0" rIns="0" bIns="0" rtlCol="0" anchor="ctr"/>
+          <a:lstStyle/>
+          <a:p>
+            <a:pPr indent="0" marL="0">
+              <a:buNone/>
+            </a:pPr>
+            <a:r>
+              <a:rPr lang="en-US" sz="1050" dirty="0">
+                <a:solidFill>
+                  <a:srgbClr val="3D4A5C"/>
+                </a:solidFill>
+                <a:latin typeface="맑은 고딕" pitchFamily="34" charset="0"/>
+                <a:ea typeface="맑은 고딕" pitchFamily="34" charset="-122"/>
+                <a:cs typeface="맑은 고딕" pitchFamily="34" charset="-120"/>
+              </a:rPr>
+              <a:t>정유기 · 필터 부하</a:t>
+            </a:r>
+            <a:endParaRPr lang="en-US" sz="1050" dirty="0"/>
+          </a:p>
+        </p:txBody>
+      </p:sp>
+      <p:sp>
+        <p:nvSpPr>
+          <p:cNvPr id="16" name="Shape 14"/>
+          <p:cNvSpPr/>
+          <p:nvPr/>
+        </p:nvSpPr>
+        <p:spPr>
+          <a:xfrm>
+            <a:off x="804672" y="3986784"/>
+            <a:ext cx="2954426" cy="402336"/>
+          </a:xfrm>
+          <a:prstGeom prst="roundRect">
+            <a:avLst>
+              <a:gd name="adj" fmla="val 15909"/>
+            </a:avLst>
+          </a:prstGeom>
+          <a:solidFill>
+            <a:srgbClr val="EEF2F9"/>
+          </a:solidFill>
+          <a:ln w="12700">
+            <a:solidFill>
+              <a:srgbClr val="333333"/>
+            </a:solidFill>
+            <a:prstDash val="solid"/>
+          </a:ln>
+        </p:spPr>
+      </p:sp>
+      <p:sp>
+        <p:nvSpPr>
+          <p:cNvPr id="17" name="Text 15"/>
+          <p:cNvSpPr/>
+          <p:nvPr/>
+        </p:nvSpPr>
+        <p:spPr>
+          <a:xfrm>
+            <a:off x="804672" y="3986784"/>
+            <a:ext cx="2954426" cy="402336"/>
+          </a:xfrm>
+          <a:prstGeom prst="rect">
+            <a:avLst/>
+          </a:prstGeom>
+          <a:noFill/>
+          <a:ln/>
+        </p:spPr>
+        <p:txBody>
+          <a:bodyPr wrap="square" lIns="0" tIns="0" rIns="0" bIns="0" rtlCol="0" anchor="ctr"/>
+          <a:lstStyle/>
+          <a:p>
+            <a:pPr algn="ctr" indent="0" marL="0">
+              <a:buNone/>
+            </a:pPr>
+            <a:r>
+              <a:rPr lang="en-US" sz="950" b="1" spc="60" kern="0" dirty="0">
+                <a:solidFill>
+                  <a:srgbClr val="2E5C8A"/>
+                </a:solidFill>
+                <a:latin typeface="맑은 고딕" pitchFamily="34" charset="0"/>
+                <a:ea typeface="맑은 고딕" pitchFamily="34" charset="-122"/>
+                <a:cs typeface="맑은 고딕" pitchFamily="34" charset="-120"/>
+              </a:rPr>
+              <a:t>Section 01 근거  05 · 06 · 07</a:t>
+            </a:r>
+            <a:endParaRPr lang="en-US" sz="950" dirty="0"/>
+          </a:p>
+        </p:txBody>
+      </p:sp>
+      <p:sp>
+        <p:nvSpPr>
+          <p:cNvPr id="18" name="Text 16"/>
+          <p:cNvSpPr/>
+          <p:nvPr/>
+        </p:nvSpPr>
+        <p:spPr>
+          <a:xfrm>
+            <a:off x="4024274" y="2926080"/>
+            <a:ext cx="329184" cy="365760"/>
+          </a:xfrm>
+          <a:prstGeom prst="rect">
+            <a:avLst/>
+          </a:prstGeom>
+          <a:noFill/>
+          <a:ln/>
+        </p:spPr>
+        <p:txBody>
+          <a:bodyPr wrap="square" lIns="0" tIns="0" rIns="0" bIns="0" rtlCol="0" anchor="ctr"/>
+          <a:lstStyle/>
+          <a:p>
+            <a:pPr algn="ctr" indent="0" marL="0">
+              <a:buNone/>
+            </a:pPr>
+            <a:r>
+              <a:rPr lang="en-US" sz="1400" dirty="0">
+                <a:solidFill>
+                  <a:srgbClr val="B9C4D6"/>
+                </a:solidFill>
+                <a:latin typeface="맑은 고딕" pitchFamily="34" charset="0"/>
+                <a:ea typeface="맑은 고딕" pitchFamily="34" charset="-122"/>
+                <a:cs typeface="맑은 고딕" pitchFamily="34" charset="-120"/>
+              </a:rPr>
+              <a:t>▶</a:t>
+            </a:r>
+            <a:endParaRPr lang="en-US" sz="1400" dirty="0"/>
+          </a:p>
+        </p:txBody>
+      </p:sp>
+      <p:sp>
+        <p:nvSpPr>
+          <p:cNvPr id="19" name="Shape 17"/>
+          <p:cNvSpPr/>
+          <p:nvPr/>
+        </p:nvSpPr>
+        <p:spPr>
+          <a:xfrm>
+            <a:off x="4380890" y="1591056"/>
+            <a:ext cx="3429914" cy="3017520"/>
+          </a:xfrm>
+          <a:prstGeom prst="roundRect">
+            <a:avLst>
+              <a:gd name="adj" fmla="val 4242"/>
+            </a:avLst>
+          </a:prstGeom>
+          <a:solidFill>
+            <a:srgbClr val="FFFFFF"/>
+          </a:solidFill>
+          <a:ln w="9525">
+            <a:solidFill>
+              <a:srgbClr val="EDF1F8"/>
+            </a:solidFill>
+            <a:prstDash val="solid"/>
+          </a:ln>
+          <a:effectLst>
+            <a:outerShdw sx="100000" sy="100000" kx="0" ky="0" algn="bl" rotWithShape="0" blurRad="127000" dist="25400" dir="5400000">
+              <a:srgbClr val="9BAAC4">
+                <a:alpha val="22000"/>
+              </a:srgbClr>
+            </a:outerShdw>
+          </a:effectLst>
+        </p:spPr>
+      </p:sp>
+      <p:sp>
+        <p:nvSpPr>
+          <p:cNvPr id="20" name="Text 18"/>
+          <p:cNvSpPr/>
+          <p:nvPr/>
+        </p:nvSpPr>
+        <p:spPr>
+          <a:xfrm>
+            <a:off x="4618634" y="1792224"/>
+            <a:ext cx="2954426" cy="219456"/>
+          </a:xfrm>
+          <a:prstGeom prst="rect">
+            <a:avLst/>
+          </a:prstGeom>
+          <a:noFill/>
+          <a:ln/>
+        </p:spPr>
+        <p:txBody>
+          <a:bodyPr wrap="square" lIns="0" tIns="0" rIns="0" bIns="0" rtlCol="0" anchor="ctr"/>
+          <a:lstStyle/>
+          <a:p>
+            <a:pPr indent="0" marL="0">
+              <a:buNone/>
+            </a:pPr>
+            <a:r>
+              <a:rPr lang="en-US" sz="950" b="1" spc="180" kern="0" dirty="0">
+                <a:solidFill>
+                  <a:srgbClr val="E17B34"/>
+                </a:solidFill>
+                <a:latin typeface="맑은 고딕" pitchFamily="34" charset="0"/>
+                <a:ea typeface="맑은 고딕" pitchFamily="34" charset="-122"/>
+                <a:cs typeface="맑은 고딕" pitchFamily="34" charset="-120"/>
+              </a:rPr>
+              <a:t>COMBUSTION</a:t>
+            </a:r>
+            <a:endParaRPr lang="en-US" sz="950" dirty="0"/>
+          </a:p>
+        </p:txBody>
+      </p:sp>
+      <p:sp>
+        <p:nvSpPr>
+          <p:cNvPr id="21" name="Text 19"/>
+          <p:cNvSpPr/>
+          <p:nvPr/>
+        </p:nvSpPr>
+        <p:spPr>
+          <a:xfrm>
+            <a:off x="4618634" y="2011680"/>
+            <a:ext cx="2954426" cy="384048"/>
+          </a:xfrm>
+          <a:prstGeom prst="rect">
+            <a:avLst/>
+          </a:prstGeom>
+          <a:noFill/>
+          <a:ln/>
+        </p:spPr>
+        <p:txBody>
+          <a:bodyPr wrap="square" lIns="0" tIns="0" rIns="0" bIns="0" rtlCol="0" anchor="ctr"/>
+          <a:lstStyle/>
+          <a:p>
+            <a:pPr indent="0" marL="0">
+              <a:buNone/>
+            </a:pPr>
+            <a:r>
+              <a:rPr lang="en-US" sz="2200" dirty="0">
+                <a:solidFill>
+                  <a:srgbClr val="1B3A5C"/>
+                </a:solidFill>
+                <a:latin typeface="바탕" pitchFamily="34" charset="0"/>
+                <a:ea typeface="바탕" pitchFamily="34" charset="-122"/>
+                <a:cs typeface="바탕" pitchFamily="34" charset="-120"/>
+              </a:rPr>
+              <a:t>연소</a:t>
+            </a:r>
+            <a:endParaRPr lang="en-US" sz="2200" dirty="0"/>
+          </a:p>
+        </p:txBody>
+      </p:sp>
+      <p:sp>
+        <p:nvSpPr>
+          <p:cNvPr id="22" name="Text 20"/>
+          <p:cNvSpPr/>
+          <p:nvPr/>
+        </p:nvSpPr>
+        <p:spPr>
+          <a:xfrm>
+            <a:off x="4618634" y="2414016"/>
+            <a:ext cx="2954426" cy="256032"/>
+          </a:xfrm>
+          <a:prstGeom prst="rect">
+            <a:avLst/>
+          </a:prstGeom>
+          <a:noFill/>
+          <a:ln/>
+        </p:spPr>
+        <p:txBody>
+          <a:bodyPr wrap="square" lIns="0" tIns="0" rIns="0" bIns="0" rtlCol="0" anchor="ctr"/>
+          <a:lstStyle/>
+          <a:p>
+            <a:pPr indent="0" marL="0">
+              <a:buNone/>
+            </a:pPr>
+            <a:r>
+              <a:rPr lang="en-US" sz="1100" b="1" dirty="0">
+                <a:solidFill>
+                  <a:srgbClr val="E17B34"/>
+                </a:solidFill>
+                <a:latin typeface="맑은 고딕" pitchFamily="34" charset="0"/>
+                <a:ea typeface="맑은 고딕" pitchFamily="34" charset="-122"/>
+                <a:cs typeface="맑은 고딕" pitchFamily="34" charset="-120"/>
+              </a:rPr>
+              <a:t>연소 효율 · 무화 · 에너지 변환</a:t>
+            </a:r>
+            <a:endParaRPr lang="en-US" sz="1100" dirty="0"/>
+          </a:p>
+        </p:txBody>
+      </p:sp>
+      <p:sp>
+        <p:nvSpPr>
+          <p:cNvPr id="23" name="Shape 21"/>
+          <p:cNvSpPr/>
+          <p:nvPr/>
+        </p:nvSpPr>
+        <p:spPr>
+          <a:xfrm>
+            <a:off x="4636922" y="2852928"/>
+            <a:ext cx="109728" cy="109728"/>
+          </a:xfrm>
+          <a:prstGeom prst="roundRect">
+            <a:avLst>
+              <a:gd name="adj" fmla="val 50000"/>
+            </a:avLst>
+          </a:prstGeom>
+          <a:solidFill>
+            <a:srgbClr val="E17B34"/>
+          </a:solidFill>
+          <a:ln w="12700">
+            <a:solidFill>
+              <a:srgbClr val="333333"/>
+            </a:solidFill>
+            <a:prstDash val="solid"/>
+          </a:ln>
+        </p:spPr>
+      </p:sp>
+      <p:sp>
+        <p:nvSpPr>
+          <p:cNvPr id="24" name="Text 22"/>
+          <p:cNvSpPr/>
+          <p:nvPr/>
+        </p:nvSpPr>
+        <p:spPr>
+          <a:xfrm>
+            <a:off x="4856378" y="2761488"/>
+            <a:ext cx="2716682" cy="310896"/>
+          </a:xfrm>
+          <a:prstGeom prst="rect">
+            <a:avLst/>
+          </a:prstGeom>
+          <a:noFill/>
+          <a:ln/>
+        </p:spPr>
+        <p:txBody>
+          <a:bodyPr wrap="square" lIns="0" tIns="0" rIns="0" bIns="0" rtlCol="0" anchor="ctr"/>
+          <a:lstStyle/>
+          <a:p>
+            <a:pPr indent="0" marL="0">
+              <a:buNone/>
+            </a:pPr>
+            <a:r>
+              <a:rPr lang="en-US" sz="1050" dirty="0">
+                <a:solidFill>
+                  <a:srgbClr val="3D4A5C"/>
+                </a:solidFill>
+                <a:latin typeface="맑은 고딕" pitchFamily="34" charset="0"/>
+                <a:ea typeface="맑은 고딕" pitchFamily="34" charset="-122"/>
+                <a:cs typeface="맑은 고딕" pitchFamily="34" charset="-120"/>
+              </a:rPr>
+              <a:t>연료가 실제로 일로 바뀌는 단계</a:t>
+            </a:r>
+            <a:endParaRPr lang="en-US" sz="1050" dirty="0"/>
+          </a:p>
+        </p:txBody>
+      </p:sp>
+      <p:sp>
+        <p:nvSpPr>
+          <p:cNvPr id="25" name="Shape 23"/>
+          <p:cNvSpPr/>
+          <p:nvPr/>
+        </p:nvSpPr>
+        <p:spPr>
+          <a:xfrm>
+            <a:off x="4636922" y="3218688"/>
+            <a:ext cx="109728" cy="109728"/>
+          </a:xfrm>
+          <a:prstGeom prst="roundRect">
+            <a:avLst>
+              <a:gd name="adj" fmla="val 50000"/>
+            </a:avLst>
+          </a:prstGeom>
+          <a:solidFill>
+            <a:srgbClr val="E17B34"/>
+          </a:solidFill>
+          <a:ln w="12700">
+            <a:solidFill>
+              <a:srgbClr val="333333"/>
+            </a:solidFill>
+            <a:prstDash val="solid"/>
+          </a:ln>
+        </p:spPr>
+      </p:sp>
+      <p:sp>
+        <p:nvSpPr>
+          <p:cNvPr id="26" name="Text 24"/>
+          <p:cNvSpPr/>
+          <p:nvPr/>
+        </p:nvSpPr>
+        <p:spPr>
+          <a:xfrm>
+            <a:off x="4856378" y="3127248"/>
+            <a:ext cx="2716682" cy="310896"/>
+          </a:xfrm>
+          <a:prstGeom prst="rect">
+            <a:avLst/>
+          </a:prstGeom>
+          <a:noFill/>
+          <a:ln/>
+        </p:spPr>
+        <p:txBody>
+          <a:bodyPr wrap="square" lIns="0" tIns="0" rIns="0" bIns="0" rtlCol="0" anchor="ctr"/>
+          <a:lstStyle/>
+          <a:p>
+            <a:pPr indent="0" marL="0">
+              <a:buNone/>
+            </a:pPr>
+            <a:r>
+              <a:rPr lang="en-US" sz="1050" dirty="0">
+                <a:solidFill>
+                  <a:srgbClr val="3D4A5C"/>
+                </a:solidFill>
+                <a:latin typeface="맑은 고딕" pitchFamily="34" charset="0"/>
+                <a:ea typeface="맑은 고딕" pitchFamily="34" charset="-122"/>
+                <a:cs typeface="맑은 고딕" pitchFamily="34" charset="-120"/>
+              </a:rPr>
+              <a:t>점도 · 잔류탄소분의 영향</a:t>
+            </a:r>
+            <a:endParaRPr lang="en-US" sz="1050" dirty="0"/>
+          </a:p>
+        </p:txBody>
+      </p:sp>
+      <p:sp>
+        <p:nvSpPr>
+          <p:cNvPr id="27" name="Shape 25"/>
+          <p:cNvSpPr/>
+          <p:nvPr/>
+        </p:nvSpPr>
+        <p:spPr>
+          <a:xfrm>
+            <a:off x="4636922" y="3584448"/>
+            <a:ext cx="109728" cy="109728"/>
+          </a:xfrm>
+          <a:prstGeom prst="roundRect">
+            <a:avLst>
+              <a:gd name="adj" fmla="val 50000"/>
+            </a:avLst>
+          </a:prstGeom>
+          <a:solidFill>
+            <a:srgbClr val="E17B34"/>
+          </a:solidFill>
+          <a:ln w="12700">
+            <a:solidFill>
+              <a:srgbClr val="333333"/>
+            </a:solidFill>
+            <a:prstDash val="solid"/>
+          </a:ln>
+        </p:spPr>
+      </p:sp>
+      <p:sp>
+        <p:nvSpPr>
+          <p:cNvPr id="28" name="Text 26"/>
+          <p:cNvSpPr/>
+          <p:nvPr/>
+        </p:nvSpPr>
+        <p:spPr>
+          <a:xfrm>
+            <a:off x="4856378" y="3493008"/>
+            <a:ext cx="2716682" cy="310896"/>
+          </a:xfrm>
+          <a:prstGeom prst="rect">
+            <a:avLst/>
+          </a:prstGeom>
+          <a:noFill/>
+          <a:ln/>
+        </p:spPr>
+        <p:txBody>
+          <a:bodyPr wrap="square" lIns="0" tIns="0" rIns="0" bIns="0" rtlCol="0" anchor="ctr"/>
+          <a:lstStyle/>
+          <a:p>
+            <a:pPr indent="0" marL="0">
+              <a:buNone/>
+            </a:pPr>
+            <a:r>
+              <a:rPr lang="en-US" sz="1050" dirty="0">
+                <a:solidFill>
+                  <a:srgbClr val="3D4A5C"/>
+                </a:solidFill>
+                <a:latin typeface="맑은 고딕" pitchFamily="34" charset="0"/>
+                <a:ea typeface="맑은 고딕" pitchFamily="34" charset="-122"/>
+                <a:cs typeface="맑은 고딕" pitchFamily="34" charset="-120"/>
+              </a:rPr>
+              <a:t>분사 상태와 착화 품질</a:t>
+            </a:r>
+            <a:endParaRPr lang="en-US" sz="1050" dirty="0"/>
+          </a:p>
+        </p:txBody>
+      </p:sp>
+      <p:sp>
+        <p:nvSpPr>
+          <p:cNvPr id="29" name="Shape 27"/>
+          <p:cNvSpPr/>
+          <p:nvPr/>
+        </p:nvSpPr>
+        <p:spPr>
+          <a:xfrm>
+            <a:off x="4618634" y="3986784"/>
+            <a:ext cx="2954426" cy="402336"/>
+          </a:xfrm>
+          <a:prstGeom prst="roundRect">
+            <a:avLst>
+              <a:gd name="adj" fmla="val 15909"/>
+            </a:avLst>
+          </a:prstGeom>
+          <a:solidFill>
+            <a:srgbClr val="FDF2E9"/>
+          </a:solidFill>
+          <a:ln w="12700">
+            <a:solidFill>
+              <a:srgbClr val="333333"/>
+            </a:solidFill>
+            <a:prstDash val="solid"/>
+          </a:ln>
+        </p:spPr>
+      </p:sp>
+      <p:sp>
+        <p:nvSpPr>
+          <p:cNvPr id="30" name="Text 28"/>
+          <p:cNvSpPr/>
+          <p:nvPr/>
+        </p:nvSpPr>
+        <p:spPr>
+          <a:xfrm>
+            <a:off x="4618634" y="3986784"/>
+            <a:ext cx="2954426" cy="402336"/>
+          </a:xfrm>
+          <a:prstGeom prst="rect">
+            <a:avLst/>
+          </a:prstGeom>
+          <a:noFill/>
+          <a:ln/>
+        </p:spPr>
+        <p:txBody>
+          <a:bodyPr wrap="square" lIns="0" tIns="0" rIns="0" bIns="0" rtlCol="0" anchor="ctr"/>
+          <a:lstStyle/>
+          <a:p>
+            <a:pPr algn="ctr" indent="0" marL="0">
+              <a:buNone/>
+            </a:pPr>
+            <a:r>
+              <a:rPr lang="en-US" sz="950" b="1" spc="60" kern="0" dirty="0">
+                <a:solidFill>
+                  <a:srgbClr val="E17B34"/>
+                </a:solidFill>
+                <a:latin typeface="맑은 고딕" pitchFamily="34" charset="0"/>
+                <a:ea typeface="맑은 고딕" pitchFamily="34" charset="-122"/>
+                <a:cs typeface="맑은 고딕" pitchFamily="34" charset="-120"/>
+              </a:rPr>
+              <a:t>Section 01 근거  04</a:t>
+            </a:r>
+            <a:endParaRPr lang="en-US" sz="950" dirty="0"/>
+          </a:p>
+        </p:txBody>
+      </p:sp>
+      <p:sp>
+        <p:nvSpPr>
+          <p:cNvPr id="31" name="Text 29"/>
+          <p:cNvSpPr/>
+          <p:nvPr/>
+        </p:nvSpPr>
+        <p:spPr>
+          <a:xfrm>
+            <a:off x="7838237" y="2926080"/>
+            <a:ext cx="329184" cy="365760"/>
+          </a:xfrm>
+          <a:prstGeom prst="rect">
+            <a:avLst/>
+          </a:prstGeom>
+          <a:noFill/>
+          <a:ln/>
+        </p:spPr>
+        <p:txBody>
+          <a:bodyPr wrap="square" lIns="0" tIns="0" rIns="0" bIns="0" rtlCol="0" anchor="ctr"/>
+          <a:lstStyle/>
+          <a:p>
+            <a:pPr algn="ctr" indent="0" marL="0">
+              <a:buNone/>
+            </a:pPr>
+            <a:r>
+              <a:rPr lang="en-US" sz="1400" dirty="0">
+                <a:solidFill>
+                  <a:srgbClr val="B9C4D6"/>
+                </a:solidFill>
+                <a:latin typeface="맑은 고딕" pitchFamily="34" charset="0"/>
+                <a:ea typeface="맑은 고딕" pitchFamily="34" charset="-122"/>
+                <a:cs typeface="맑은 고딕" pitchFamily="34" charset="-120"/>
+              </a:rPr>
+              <a:t>▶</a:t>
+            </a:r>
+            <a:endParaRPr lang="en-US" sz="1400" dirty="0"/>
+          </a:p>
+        </p:txBody>
+      </p:sp>
+      <p:sp>
+        <p:nvSpPr>
+          <p:cNvPr id="32" name="Shape 30"/>
+          <p:cNvSpPr/>
+          <p:nvPr/>
+        </p:nvSpPr>
+        <p:spPr>
+          <a:xfrm>
+            <a:off x="8194853" y="1591056"/>
+            <a:ext cx="3429914" cy="3017520"/>
+          </a:xfrm>
+          <a:prstGeom prst="roundRect">
+            <a:avLst>
+              <a:gd name="adj" fmla="val 4242"/>
+            </a:avLst>
+          </a:prstGeom>
+          <a:solidFill>
+            <a:srgbClr val="FFFFFF"/>
+          </a:solidFill>
+          <a:ln w="9525">
+            <a:solidFill>
+              <a:srgbClr val="EDF1F8"/>
+            </a:solidFill>
+            <a:prstDash val="solid"/>
+          </a:ln>
+          <a:effectLst>
+            <a:outerShdw sx="100000" sy="100000" kx="0" ky="0" algn="bl" rotWithShape="0" blurRad="127000" dist="25400" dir="5400000">
+              <a:srgbClr val="9BAAC4">
+                <a:alpha val="22000"/>
+              </a:srgbClr>
+            </a:outerShdw>
+          </a:effectLst>
+        </p:spPr>
+      </p:sp>
+      <p:sp>
+        <p:nvSpPr>
+          <p:cNvPr id="33" name="Text 31"/>
+          <p:cNvSpPr/>
+          <p:nvPr/>
+        </p:nvSpPr>
+        <p:spPr>
+          <a:xfrm>
+            <a:off x="8432597" y="1792224"/>
+            <a:ext cx="2954426" cy="219456"/>
+          </a:xfrm>
+          <a:prstGeom prst="rect">
+            <a:avLst/>
+          </a:prstGeom>
+          <a:noFill/>
+          <a:ln/>
+        </p:spPr>
+        <p:txBody>
+          <a:bodyPr wrap="square" lIns="0" tIns="0" rIns="0" bIns="0" rtlCol="0" anchor="ctr"/>
+          <a:lstStyle/>
+          <a:p>
+            <a:pPr indent="0" marL="0">
+              <a:buNone/>
+            </a:pPr>
+            <a:r>
+              <a:rPr lang="en-US" sz="950" b="1" spc="180" kern="0" dirty="0">
+                <a:solidFill>
+                  <a:srgbClr val="2E7D5B"/>
+                </a:solidFill>
+                <a:latin typeface="맑은 고딕" pitchFamily="34" charset="0"/>
+                <a:ea typeface="맑은 고딕" pitchFamily="34" charset="-122"/>
+                <a:cs typeface="맑은 고딕" pitchFamily="34" charset="-120"/>
+              </a:rPr>
+              <a:t>POST-COMBUSTION</a:t>
+            </a:r>
+            <a:endParaRPr lang="en-US" sz="950" dirty="0"/>
+          </a:p>
+        </p:txBody>
+      </p:sp>
+      <p:sp>
+        <p:nvSpPr>
+          <p:cNvPr id="34" name="Text 32"/>
+          <p:cNvSpPr/>
+          <p:nvPr/>
+        </p:nvSpPr>
+        <p:spPr>
+          <a:xfrm>
+            <a:off x="8432597" y="2011680"/>
+            <a:ext cx="2954426" cy="384048"/>
+          </a:xfrm>
+          <a:prstGeom prst="rect">
+            <a:avLst/>
+          </a:prstGeom>
+          <a:noFill/>
+          <a:ln/>
+        </p:spPr>
+        <p:txBody>
+          <a:bodyPr wrap="square" lIns="0" tIns="0" rIns="0" bIns="0" rtlCol="0" anchor="ctr"/>
+          <a:lstStyle/>
+          <a:p>
+            <a:pPr indent="0" marL="0">
+              <a:buNone/>
+            </a:pPr>
+            <a:r>
+              <a:rPr lang="en-US" sz="2200" dirty="0">
+                <a:solidFill>
+                  <a:srgbClr val="1B3A5C"/>
+                </a:solidFill>
+                <a:latin typeface="바탕" pitchFamily="34" charset="0"/>
+                <a:ea typeface="바탕" pitchFamily="34" charset="-122"/>
+                <a:cs typeface="바탕" pitchFamily="34" charset="-120"/>
+              </a:rPr>
+              <a:t>연소 후</a:t>
+            </a:r>
+            <a:endParaRPr lang="en-US" sz="2200" dirty="0"/>
+          </a:p>
+        </p:txBody>
+      </p:sp>
+      <p:sp>
+        <p:nvSpPr>
+          <p:cNvPr id="35" name="Text 33"/>
+          <p:cNvSpPr/>
+          <p:nvPr/>
+        </p:nvSpPr>
+        <p:spPr>
+          <a:xfrm>
+            <a:off x="8432597" y="2414016"/>
+            <a:ext cx="2954426" cy="256032"/>
+          </a:xfrm>
+          <a:prstGeom prst="rect">
+            <a:avLst/>
+          </a:prstGeom>
+          <a:noFill/>
+          <a:ln/>
+        </p:spPr>
+        <p:txBody>
+          <a:bodyPr wrap="square" lIns="0" tIns="0" rIns="0" bIns="0" rtlCol="0" anchor="ctr"/>
+          <a:lstStyle/>
+          <a:p>
+            <a:pPr indent="0" marL="0">
+              <a:buNone/>
+            </a:pPr>
+            <a:r>
+              <a:rPr lang="en-US" sz="1100" b="1" dirty="0">
+                <a:solidFill>
+                  <a:srgbClr val="2E7D5B"/>
+                </a:solidFill>
+                <a:latin typeface="맑은 고딕" pitchFamily="34" charset="0"/>
+                <a:ea typeface="맑은 고딕" pitchFamily="34" charset="-122"/>
+                <a:cs typeface="맑은 고딕" pitchFamily="34" charset="-120"/>
+              </a:rPr>
+              <a:t>매연 제어 · 열회수 · 계통 청결</a:t>
+            </a:r>
+            <a:endParaRPr lang="en-US" sz="1100" dirty="0"/>
+          </a:p>
+        </p:txBody>
+      </p:sp>
+      <p:sp>
+        <p:nvSpPr>
+          <p:cNvPr id="36" name="Shape 34"/>
+          <p:cNvSpPr/>
+          <p:nvPr/>
+        </p:nvSpPr>
+        <p:spPr>
+          <a:xfrm>
+            <a:off x="8450885" y="2852928"/>
+            <a:ext cx="109728" cy="109728"/>
+          </a:xfrm>
+          <a:prstGeom prst="roundRect">
+            <a:avLst>
+              <a:gd name="adj" fmla="val 50000"/>
+            </a:avLst>
+          </a:prstGeom>
+          <a:solidFill>
+            <a:srgbClr val="2E7D5B"/>
+          </a:solidFill>
+          <a:ln w="12700">
+            <a:solidFill>
+              <a:srgbClr val="333333"/>
+            </a:solidFill>
+            <a:prstDash val="solid"/>
+          </a:ln>
+        </p:spPr>
+      </p:sp>
+      <p:sp>
+        <p:nvSpPr>
+          <p:cNvPr id="37" name="Text 35"/>
+          <p:cNvSpPr/>
+          <p:nvPr/>
+        </p:nvSpPr>
+        <p:spPr>
+          <a:xfrm>
+            <a:off x="8670341" y="2761488"/>
+            <a:ext cx="2716682" cy="310896"/>
+          </a:xfrm>
+          <a:prstGeom prst="rect">
+            <a:avLst/>
+          </a:prstGeom>
+          <a:noFill/>
+          <a:ln/>
+        </p:spPr>
+        <p:txBody>
+          <a:bodyPr wrap="square" lIns="0" tIns="0" rIns="0" bIns="0" rtlCol="0" anchor="ctr"/>
+          <a:lstStyle/>
+          <a:p>
+            <a:pPr indent="0" marL="0">
+              <a:buNone/>
+            </a:pPr>
+            <a:r>
+              <a:rPr lang="en-US" sz="1050" dirty="0">
+                <a:solidFill>
+                  <a:srgbClr val="3D4A5C"/>
+                </a:solidFill>
+                <a:latin typeface="맑은 고딕" pitchFamily="34" charset="0"/>
+                <a:ea typeface="맑은 고딕" pitchFamily="34" charset="-122"/>
+                <a:cs typeface="맑은 고딕" pitchFamily="34" charset="-120"/>
+              </a:rPr>
+              <a:t>배기가 계통을 빠져나가는 단계</a:t>
+            </a:r>
+            <a:endParaRPr lang="en-US" sz="1050" dirty="0"/>
+          </a:p>
+        </p:txBody>
+      </p:sp>
+      <p:sp>
+        <p:nvSpPr>
+          <p:cNvPr id="38" name="Shape 36"/>
+          <p:cNvSpPr/>
+          <p:nvPr/>
+        </p:nvSpPr>
+        <p:spPr>
+          <a:xfrm>
+            <a:off x="8450885" y="3218688"/>
+            <a:ext cx="109728" cy="109728"/>
+          </a:xfrm>
+          <a:prstGeom prst="roundRect">
+            <a:avLst>
+              <a:gd name="adj" fmla="val 50000"/>
+            </a:avLst>
+          </a:prstGeom>
+          <a:solidFill>
+            <a:srgbClr val="2E7D5B"/>
+          </a:solidFill>
+          <a:ln w="12700">
+            <a:solidFill>
+              <a:srgbClr val="333333"/>
+            </a:solidFill>
+            <a:prstDash val="solid"/>
+          </a:ln>
+        </p:spPr>
+      </p:sp>
+      <p:sp>
+        <p:nvSpPr>
+          <p:cNvPr id="39" name="Text 37"/>
+          <p:cNvSpPr/>
+          <p:nvPr/>
+        </p:nvSpPr>
+        <p:spPr>
+          <a:xfrm>
+            <a:off x="8670341" y="3127248"/>
+            <a:ext cx="2716682" cy="310896"/>
+          </a:xfrm>
+          <a:prstGeom prst="rect">
+            <a:avLst/>
+          </a:prstGeom>
+          <a:noFill/>
+          <a:ln/>
+        </p:spPr>
+        <p:txBody>
+          <a:bodyPr wrap="square" lIns="0" tIns="0" rIns="0" bIns="0" rtlCol="0" anchor="ctr"/>
+          <a:lstStyle/>
+          <a:p>
+            <a:pPr indent="0" marL="0">
+              <a:buNone/>
+            </a:pPr>
+            <a:r>
+              <a:rPr lang="en-US" sz="1050" dirty="0">
+                <a:solidFill>
+                  <a:srgbClr val="3D4A5C"/>
+                </a:solidFill>
+                <a:latin typeface="맑은 고딕" pitchFamily="34" charset="0"/>
+                <a:ea typeface="맑은 고딕" pitchFamily="34" charset="-122"/>
+                <a:cs typeface="맑은 고딕" pitchFamily="34" charset="-120"/>
+              </a:rPr>
+              <a:t>터보차저 · 열회수면 퇴적</a:t>
+            </a:r>
+            <a:endParaRPr lang="en-US" sz="1050" dirty="0"/>
+          </a:p>
+        </p:txBody>
+      </p:sp>
+      <p:sp>
+        <p:nvSpPr>
+          <p:cNvPr id="40" name="Shape 38"/>
+          <p:cNvSpPr/>
+          <p:nvPr/>
+        </p:nvSpPr>
+        <p:spPr>
+          <a:xfrm>
+            <a:off x="8450885" y="3584448"/>
+            <a:ext cx="109728" cy="109728"/>
+          </a:xfrm>
+          <a:prstGeom prst="roundRect">
+            <a:avLst>
+              <a:gd name="adj" fmla="val 50000"/>
+            </a:avLst>
+          </a:prstGeom>
+          <a:solidFill>
+            <a:srgbClr val="2E7D5B"/>
+          </a:solidFill>
+          <a:ln w="12700">
+            <a:solidFill>
+              <a:srgbClr val="333333"/>
+            </a:solidFill>
+            <a:prstDash val="solid"/>
+          </a:ln>
+        </p:spPr>
+      </p:sp>
+      <p:sp>
+        <p:nvSpPr>
+          <p:cNvPr id="41" name="Text 39"/>
+          <p:cNvSpPr/>
+          <p:nvPr/>
+        </p:nvSpPr>
+        <p:spPr>
+          <a:xfrm>
+            <a:off x="8670341" y="3493008"/>
+            <a:ext cx="2716682" cy="310896"/>
+          </a:xfrm>
+          <a:prstGeom prst="rect">
+            <a:avLst/>
+          </a:prstGeom>
+          <a:noFill/>
+          <a:ln/>
+        </p:spPr>
+        <p:txBody>
+          <a:bodyPr wrap="square" lIns="0" tIns="0" rIns="0" bIns="0" rtlCol="0" anchor="ctr"/>
+          <a:lstStyle/>
+          <a:p>
+            <a:pPr indent="0" marL="0">
+              <a:buNone/>
+            </a:pPr>
+            <a:r>
+              <a:rPr lang="en-US" sz="1050" dirty="0">
+                <a:solidFill>
+                  <a:srgbClr val="3D4A5C"/>
+                </a:solidFill>
+                <a:latin typeface="맑은 고딕" pitchFamily="34" charset="0"/>
+                <a:ea typeface="맑은 고딕" pitchFamily="34" charset="-122"/>
+                <a:cs typeface="맑은 고딕" pitchFamily="34" charset="-120"/>
+              </a:rPr>
+              <a:t>청소 주기와 배압</a:t>
+            </a:r>
+            <a:endParaRPr lang="en-US" sz="1050" dirty="0"/>
+          </a:p>
+        </p:txBody>
+      </p:sp>
+      <p:sp>
+        <p:nvSpPr>
+          <p:cNvPr id="42" name="Shape 40"/>
+          <p:cNvSpPr/>
+          <p:nvPr/>
+        </p:nvSpPr>
+        <p:spPr>
+          <a:xfrm>
+            <a:off x="8432597" y="3986784"/>
+            <a:ext cx="2954426" cy="402336"/>
+          </a:xfrm>
+          <a:prstGeom prst="roundRect">
+            <a:avLst>
+              <a:gd name="adj" fmla="val 15909"/>
+            </a:avLst>
+          </a:prstGeom>
+          <a:solidFill>
+            <a:srgbClr val="E9F5F0"/>
+          </a:solidFill>
+          <a:ln w="12700">
+            <a:solidFill>
+              <a:srgbClr val="333333"/>
+            </a:solidFill>
+            <a:prstDash val="solid"/>
+          </a:ln>
+        </p:spPr>
+      </p:sp>
+      <p:sp>
+        <p:nvSpPr>
+          <p:cNvPr id="43" name="Text 41"/>
+          <p:cNvSpPr/>
+          <p:nvPr/>
+        </p:nvSpPr>
+        <p:spPr>
+          <a:xfrm>
+            <a:off x="8432597" y="3986784"/>
+            <a:ext cx="2954426" cy="402336"/>
+          </a:xfrm>
+          <a:prstGeom prst="rect">
+            <a:avLst/>
+          </a:prstGeom>
+          <a:noFill/>
+          <a:ln/>
+        </p:spPr>
+        <p:txBody>
+          <a:bodyPr wrap="square" lIns="0" tIns="0" rIns="0" bIns="0" rtlCol="0" anchor="ctr"/>
+          <a:lstStyle/>
+          <a:p>
+            <a:pPr algn="ctr" indent="0" marL="0">
+              <a:buNone/>
+            </a:pPr>
+            <a:r>
+              <a:rPr lang="en-US" sz="950" b="1" spc="60" kern="0" dirty="0">
+                <a:solidFill>
+                  <a:srgbClr val="2E7D5B"/>
+                </a:solidFill>
+                <a:latin typeface="맑은 고딕" pitchFamily="34" charset="0"/>
+                <a:ea typeface="맑은 고딕" pitchFamily="34" charset="-122"/>
+                <a:cs typeface="맑은 고딕" pitchFamily="34" charset="-120"/>
+              </a:rPr>
+              <a:t>Section 01 근거  03</a:t>
+            </a:r>
+            <a:endParaRPr lang="en-US" sz="950" dirty="0"/>
+          </a:p>
+        </p:txBody>
+      </p:sp>
+      <p:sp>
+        <p:nvSpPr>
+          <p:cNvPr id="44" name="Shape 42"/>
+          <p:cNvSpPr/>
+          <p:nvPr/>
+        </p:nvSpPr>
+        <p:spPr>
+          <a:xfrm>
+            <a:off x="566928" y="4791456"/>
+            <a:ext cx="11057839" cy="786384"/>
+          </a:xfrm>
+          <a:prstGeom prst="roundRect">
+            <a:avLst>
+              <a:gd name="adj" fmla="val 11628"/>
+            </a:avLst>
+          </a:prstGeom>
+          <a:solidFill>
+            <a:srgbClr val="1B3A5C"/>
+          </a:solidFill>
+          <a:ln w="12700">
+            <a:solidFill>
+              <a:srgbClr val="1B3A5C"/>
+            </a:solidFill>
+            <a:prstDash val="solid"/>
+          </a:ln>
+        </p:spPr>
+      </p:sp>
+      <p:sp>
+        <p:nvSpPr>
+          <p:cNvPr id="45" name="Text 43"/>
+          <p:cNvSpPr/>
+          <p:nvPr/>
+        </p:nvSpPr>
+        <p:spPr>
+          <a:xfrm>
+            <a:off x="795528" y="4791456"/>
+            <a:ext cx="10600639" cy="786384"/>
+          </a:xfrm>
+          <a:prstGeom prst="rect">
+            <a:avLst/>
+          </a:prstGeom>
+          <a:noFill/>
+          <a:ln/>
+        </p:spPr>
+        <p:txBody>
+          <a:bodyPr wrap="square" lIns="0" tIns="0" rIns="0" bIns="0" rtlCol="0" anchor="ctr"/>
+          <a:lstStyle/>
+          <a:p>
+            <a:pPr algn="ctr" indent="0" marL="0">
+              <a:buNone/>
+            </a:pPr>
+            <a:r>
+              <a:rPr lang="en-US" sz="1700" b="1" dirty="0">
+                <a:solidFill>
+                  <a:srgbClr val="E17B34"/>
+                </a:solidFill>
+                <a:latin typeface="바탕" pitchFamily="34" charset="0"/>
+                <a:ea typeface="바탕" pitchFamily="34" charset="-122"/>
+                <a:cs typeface="바탕" pitchFamily="34" charset="-120"/>
+              </a:rPr>
+              <a:t>“ </a:t>
+            </a:r>
+            <a:pPr algn="ctr" indent="0" marL="0">
+              <a:buNone/>
+            </a:pPr>
+            <a:r>
+              <a:rPr lang="en-US" sz="1400" b="1" dirty="0">
+                <a:solidFill>
+                  <a:srgbClr val="FFFFFF"/>
+                </a:solidFill>
+                <a:latin typeface="맑은 고딕" pitchFamily="34" charset="0"/>
+                <a:ea typeface="맑은 고딕" pitchFamily="34" charset="-122"/>
+                <a:cs typeface="맑은 고딕" pitchFamily="34" charset="-120"/>
+              </a:rPr>
+              <a:t>Well-to-Wake는 규제 보고의 틀이고, Tank-to-Wake는 본선이 실제로 통제할 수 있는 구간입니다.</a:t>
+            </a:r>
+            <a:pPr algn="ctr" indent="0" marL="0">
+              <a:buNone/>
+            </a:pPr>
+            <a:r>
+              <a:rPr lang="en-US" sz="1700" b="1" dirty="0">
+                <a:solidFill>
+                  <a:srgbClr val="E17B34"/>
+                </a:solidFill>
+                <a:latin typeface="바탕" pitchFamily="34" charset="0"/>
+                <a:ea typeface="바탕" pitchFamily="34" charset="-122"/>
+                <a:cs typeface="바탕" pitchFamily="34" charset="-120"/>
+              </a:rPr>
+              <a:t> ”</a:t>
+            </a:r>
+            <a:endParaRPr lang="en-US" sz="1700" dirty="0"/>
+          </a:p>
+        </p:txBody>
+      </p:sp>
+      <p:sp>
+        <p:nvSpPr>
+          <p:cNvPr id="46" name="Text 44"/>
+          <p:cNvSpPr/>
+          <p:nvPr/>
+        </p:nvSpPr>
+        <p:spPr>
+          <a:xfrm>
+            <a:off x="566928" y="5705856"/>
+            <a:ext cx="11057839" cy="219456"/>
+          </a:xfrm>
+          <a:prstGeom prst="rect">
+            <a:avLst/>
+          </a:prstGeom>
+          <a:noFill/>
+          <a:ln/>
+        </p:spPr>
+        <p:txBody>
+          <a:bodyPr wrap="square" lIns="0" tIns="0" rIns="0" bIns="0" rtlCol="0" anchor="ctr"/>
+          <a:lstStyle/>
+          <a:p>
+            <a:pPr indent="0" marL="0">
+              <a:buNone/>
+            </a:pPr>
+            <a:r>
+              <a:rPr lang="en-US" sz="850" i="1" dirty="0">
+                <a:solidFill>
+                  <a:srgbClr val="8A94A6"/>
+                </a:solidFill>
+                <a:latin typeface="맑은 고딕" pitchFamily="34" charset="0"/>
+                <a:ea typeface="맑은 고딕" pitchFamily="34" charset="-122"/>
+                <a:cs typeface="맑은 고딕" pitchFamily="34" charset="-120"/>
+              </a:rPr>
+              <a:t>출처: Wilhelmsen Ships Service, “How holistic fuel management supports cleaner and more efficient vessel operations” (Tank to Wake)</a:t>
+            </a:r>
+            <a:endParaRPr lang="en-US" sz="850" dirty="0"/>
+          </a:p>
+        </p:txBody>
+      </p:sp>
+    </p:spTree>
+  </p:cSld>
+  <p:clrMapOvr>
+    <a:masterClrMapping/>
+  </p:clrMapOvr>
+</p:sld>
+</file>
+
+<file path=ppt/slides/slide11.xml><?xml version="1.0" encoding="utf-8"?>
+<p:sld xmlns:a="http://schemas.openxmlformats.org/drawingml/2006/main" xmlns:r="http://schemas.openxmlformats.org/officeDocument/2006/relationships" xmlns:p="http://schemas.openxmlformats.org/presentationml/2006/main">
+  <p:cSld name="Slide 11">
+    <p:bg>
+      <p:bgPr>
+        <a:solidFill>
+          <a:srgbClr val="F4F6FB"/>
+        </a:solidFill>
+      </p:bgPr>
+    </p:bg>
+    <p:spTree>
+      <p:nvGrpSpPr>
+        <p:cNvPr id="1" name=""/>
+        <p:cNvGrpSpPr/>
+        <p:nvPr/>
+      </p:nvGrpSpPr>
+      <p:grpSpPr>
+        <a:xfrm>
+          <a:off x="0" y="0"/>
+          <a:ext cx="0" cy="0"/>
+          <a:chOff x="0" y="0"/>
+          <a:chExt cx="0" cy="0"/>
+        </a:xfrm>
+      </p:grpSpPr>
+      <p:sp>
+        <p:nvSpPr>
+          <p:cNvPr id="2" name="Text 0"/>
+          <p:cNvSpPr/>
+          <p:nvPr/>
+        </p:nvSpPr>
+        <p:spPr>
+          <a:xfrm>
+            <a:off x="566928" y="402336"/>
+            <a:ext cx="7315200" cy="256032"/>
+          </a:xfrm>
+          <a:prstGeom prst="rect">
+            <a:avLst/>
+          </a:prstGeom>
+          <a:noFill/>
+          <a:ln/>
+        </p:spPr>
+        <p:txBody>
+          <a:bodyPr wrap="square" lIns="0" tIns="0" rIns="0" bIns="0" rtlCol="0" anchor="ctr"/>
+          <a:lstStyle/>
+          <a:p>
+            <a:pPr algn="l" indent="0" marL="0">
+              <a:buNone/>
+            </a:pPr>
+            <a:r>
+              <a:rPr lang="en-US" sz="1150" b="1" spc="240" kern="0" dirty="0">
+                <a:solidFill>
+                  <a:srgbClr val="E17B34"/>
+                </a:solidFill>
+                <a:latin typeface="맑은 고딕" pitchFamily="34" charset="0"/>
+                <a:ea typeface="맑은 고딕" pitchFamily="34" charset="-122"/>
+                <a:cs typeface="맑은 고딕" pitchFamily="34" charset="-120"/>
+              </a:rPr>
+              <a:t>10   결론</a:t>
+            </a:r>
+            <a:endParaRPr lang="en-US" sz="1150" dirty="0"/>
+          </a:p>
+        </p:txBody>
+      </p:sp>
+      <p:sp>
+        <p:nvSpPr>
+          <p:cNvPr id="3" name="Text 1"/>
+          <p:cNvSpPr/>
+          <p:nvPr/>
+        </p:nvSpPr>
+        <p:spPr>
+          <a:xfrm>
+            <a:off x="566928" y="694944"/>
+            <a:ext cx="11057839" cy="713232"/>
+          </a:xfrm>
+          <a:prstGeom prst="rect">
+            <a:avLst/>
+          </a:prstGeom>
+          <a:noFill/>
+          <a:ln/>
+        </p:spPr>
+        <p:txBody>
+          <a:bodyPr wrap="square" lIns="0" tIns="0" rIns="0" bIns="0" rtlCol="0" anchor="ctr"/>
+          <a:lstStyle/>
+          <a:p>
+            <a:pPr algn="l" indent="0" marL="0">
+              <a:buNone/>
+            </a:pPr>
+            <a:r>
+              <a:rPr lang="en-US" sz="3600" dirty="0">
+                <a:solidFill>
+                  <a:srgbClr val="1B3A5C"/>
+                </a:solidFill>
+                <a:latin typeface="바탕" pitchFamily="34" charset="0"/>
+                <a:ea typeface="바탕" pitchFamily="34" charset="-122"/>
+                <a:cs typeface="바탕" pitchFamily="34" charset="-120"/>
+              </a:rPr>
+              <a:t>손실은 단계마다 쌓입니다</a:t>
+            </a:r>
+            <a:endParaRPr lang="en-US" sz="3600" dirty="0"/>
+          </a:p>
+        </p:txBody>
+      </p:sp>
+      <p:sp>
+        <p:nvSpPr>
+          <p:cNvPr id="4" name="Text 2"/>
+          <p:cNvSpPr/>
+          <p:nvPr/>
+        </p:nvSpPr>
+        <p:spPr>
+          <a:xfrm>
+            <a:off x="566928" y="6419088"/>
+            <a:ext cx="8778240" cy="274320"/>
+          </a:xfrm>
+          <a:prstGeom prst="rect">
+            <a:avLst/>
+          </a:prstGeom>
+          <a:noFill/>
+          <a:ln/>
+        </p:spPr>
+        <p:txBody>
+          <a:bodyPr wrap="square" lIns="0" tIns="0" rIns="0" bIns="0" rtlCol="0" anchor="ctr"/>
+          <a:lstStyle/>
+          <a:p>
+            <a:pPr indent="0" marL="0">
+              <a:buNone/>
+            </a:pPr>
+            <a:r>
+              <a:rPr lang="en-US" sz="850" dirty="0">
+                <a:solidFill>
+                  <a:srgbClr val="8A94A6"/>
+                </a:solidFill>
+                <a:latin typeface="맑은 고딕" pitchFamily="34" charset="0"/>
+                <a:ea typeface="맑은 고딕" pitchFamily="34" charset="-122"/>
+                <a:cs typeface="맑은 고딕" pitchFamily="34" charset="-120"/>
+              </a:rPr>
+              <a:t>Classified as Internal - This content is proprietary information intended for employees and partners only.</a:t>
+            </a:r>
+            <a:endParaRPr lang="en-US" sz="850" dirty="0"/>
+          </a:p>
+        </p:txBody>
+      </p:sp>
+      <p:sp>
+        <p:nvSpPr>
+          <p:cNvPr id="5" name="Text 3"/>
+          <p:cNvSpPr/>
+          <p:nvPr/>
+        </p:nvSpPr>
+        <p:spPr>
+          <a:xfrm>
+            <a:off x="11155680" y="6419088"/>
+            <a:ext cx="502920" cy="274320"/>
+          </a:xfrm>
+          <a:prstGeom prst="rect">
+            <a:avLst/>
+          </a:prstGeom>
+          <a:noFill/>
+          <a:ln/>
+        </p:spPr>
+        <p:txBody>
+          <a:bodyPr wrap="square" lIns="0" tIns="0" rIns="0" bIns="0" rtlCol="0" anchor="ctr"/>
+          <a:lstStyle/>
+          <a:p>
+            <a:pPr algn="r" indent="0" marL="0">
+              <a:buNone/>
+            </a:pPr>
+            <a:r>
+              <a:rPr lang="en-US" sz="950" dirty="0">
+                <a:solidFill>
+                  <a:srgbClr val="8A94A6"/>
+                </a:solidFill>
+                <a:latin typeface="맑은 고딕" pitchFamily="34" charset="0"/>
+                <a:ea typeface="맑은 고딕" pitchFamily="34" charset="-122"/>
+                <a:cs typeface="맑은 고딕" pitchFamily="34" charset="-120"/>
+              </a:rPr>
+              <a:t>11</a:t>
+            </a:r>
+            <a:endParaRPr lang="en-US" sz="950" dirty="0"/>
+          </a:p>
+        </p:txBody>
+      </p:sp>
+      <p:sp>
+        <p:nvSpPr>
+          <p:cNvPr id="6" name="Shape 4"/>
+          <p:cNvSpPr/>
+          <p:nvPr/>
+        </p:nvSpPr>
+        <p:spPr>
+          <a:xfrm>
+            <a:off x="566928" y="1591056"/>
+            <a:ext cx="2421560" cy="1481328"/>
+          </a:xfrm>
+          <a:prstGeom prst="roundRect">
+            <a:avLst>
+              <a:gd name="adj" fmla="val 8642"/>
+            </a:avLst>
+          </a:prstGeom>
+          <a:solidFill>
+            <a:srgbClr val="FFFFFF"/>
+          </a:solidFill>
+          <a:ln w="9525">
+            <a:solidFill>
+              <a:srgbClr val="EDF1F8"/>
+            </a:solidFill>
+            <a:prstDash val="solid"/>
+          </a:ln>
+          <a:effectLst>
+            <a:outerShdw sx="100000" sy="100000" kx="0" ky="0" algn="bl" rotWithShape="0" blurRad="127000" dist="25400" dir="5400000">
+              <a:srgbClr val="9BAAC4">
+                <a:alpha val="22000"/>
+              </a:srgbClr>
+            </a:outerShdw>
+          </a:effectLst>
+        </p:spPr>
+      </p:sp>
+      <p:sp>
+        <p:nvSpPr>
+          <p:cNvPr id="7" name="Shape 5"/>
+          <p:cNvSpPr/>
+          <p:nvPr/>
+        </p:nvSpPr>
+        <p:spPr>
+          <a:xfrm>
+            <a:off x="804672" y="1773936"/>
+            <a:ext cx="310896" cy="310896"/>
+          </a:xfrm>
+          <a:prstGeom prst="roundRect">
+            <a:avLst>
+              <a:gd name="adj" fmla="val 50000"/>
+            </a:avLst>
+          </a:prstGeom>
+          <a:solidFill>
+            <a:srgbClr val="2E5C8A"/>
+          </a:solidFill>
+          <a:ln w="12700">
+            <a:solidFill>
+              <a:srgbClr val="333333"/>
+            </a:solidFill>
+            <a:prstDash val="solid"/>
+          </a:ln>
+        </p:spPr>
+      </p:sp>
+      <p:sp>
+        <p:nvSpPr>
+          <p:cNvPr id="8" name="Text 6"/>
+          <p:cNvSpPr/>
+          <p:nvPr/>
+        </p:nvSpPr>
+        <p:spPr>
+          <a:xfrm>
+            <a:off x="804672" y="1773936"/>
+            <a:ext cx="310896" cy="310896"/>
+          </a:xfrm>
+          <a:prstGeom prst="rect">
+            <a:avLst/>
+          </a:prstGeom>
+          <a:noFill/>
+          <a:ln/>
+        </p:spPr>
+        <p:txBody>
+          <a:bodyPr wrap="square" lIns="0" tIns="0" rIns="0" bIns="0" rtlCol="0" anchor="ctr"/>
+          <a:lstStyle/>
+          <a:p>
+            <a:pPr algn="ctr" indent="0" marL="0">
+              <a:buNone/>
+            </a:pPr>
+            <a:r>
+              <a:rPr lang="en-US" sz="1100" b="1" dirty="0">
+                <a:solidFill>
+                  <a:srgbClr val="FFFFFF"/>
+                </a:solidFill>
+                <a:latin typeface="맑은 고딕" pitchFamily="34" charset="0"/>
+                <a:ea typeface="맑은 고딕" pitchFamily="34" charset="-122"/>
+                <a:cs typeface="맑은 고딕" pitchFamily="34" charset="-120"/>
+              </a:rPr>
+              <a:t>1</a:t>
+            </a:r>
+            <a:endParaRPr lang="en-US" sz="1100" dirty="0"/>
+          </a:p>
+        </p:txBody>
+      </p:sp>
+      <p:sp>
+        <p:nvSpPr>
+          <p:cNvPr id="9" name="Text 7"/>
+          <p:cNvSpPr/>
+          <p:nvPr/>
+        </p:nvSpPr>
+        <p:spPr>
+          <a:xfrm>
+            <a:off x="1207008" y="1773936"/>
+            <a:ext cx="1543736" cy="310896"/>
+          </a:xfrm>
+          <a:prstGeom prst="rect">
+            <a:avLst/>
+          </a:prstGeom>
+          <a:noFill/>
+          <a:ln/>
+        </p:spPr>
+        <p:txBody>
+          <a:bodyPr wrap="square" lIns="0" tIns="0" rIns="0" bIns="0" rtlCol="0" anchor="ctr"/>
+          <a:lstStyle/>
+          <a:p>
+            <a:pPr indent="0" marL="0">
+              <a:buNone/>
+            </a:pPr>
+            <a:r>
+              <a:rPr lang="en-US" sz="1250" b="1" dirty="0">
+                <a:solidFill>
+                  <a:srgbClr val="1B3A5C"/>
+                </a:solidFill>
+                <a:latin typeface="맑은 고딕" pitchFamily="34" charset="0"/>
+                <a:ea typeface="맑은 고딕" pitchFamily="34" charset="-122"/>
+                <a:cs typeface="맑은 고딕" pitchFamily="34" charset="-120"/>
+              </a:rPr>
+              <a:t>저장 중 열화</a:t>
+            </a:r>
+            <a:endParaRPr lang="en-US" sz="1250" dirty="0"/>
+          </a:p>
+        </p:txBody>
+      </p:sp>
+      <p:sp>
+        <p:nvSpPr>
+          <p:cNvPr id="10" name="Text 8"/>
+          <p:cNvSpPr/>
+          <p:nvPr/>
+        </p:nvSpPr>
+        <p:spPr>
+          <a:xfrm>
+            <a:off x="804672" y="2194560"/>
+            <a:ext cx="1946072" cy="694944"/>
+          </a:xfrm>
+          <a:prstGeom prst="rect">
+            <a:avLst/>
+          </a:prstGeom>
+          <a:noFill/>
+          <a:ln/>
+        </p:spPr>
+        <p:txBody>
+          <a:bodyPr wrap="square" lIns="0" tIns="0" rIns="0" bIns="0" rtlCol="0" anchor="t"/>
+          <a:lstStyle/>
+          <a:p>
+            <a:pPr indent="0" marL="0">
+              <a:lnSpc>
+                <a:spcPts val="1500"/>
+              </a:lnSpc>
+              <a:buNone/>
+            </a:pPr>
+            <a:r>
+              <a:rPr lang="en-US" sz="1050" dirty="0">
+                <a:solidFill>
+                  <a:srgbClr val="3D4A5C"/>
+                </a:solidFill>
+                <a:latin typeface="맑은 고딕" pitchFamily="34" charset="0"/>
+                <a:ea typeface="맑은 고딕" pitchFamily="34" charset="-122"/>
+                <a:cs typeface="맑은 고딕" pitchFamily="34" charset="-120"/>
+              </a:rPr>
+              <a:t>연료가 탱크 안에서</a:t>
+            </a:r>
+            <a:endParaRPr lang="en-US" sz="1050" dirty="0"/>
+          </a:p>
+          <a:p>
+            <a:pPr indent="0" marL="0">
+              <a:lnSpc>
+                <a:spcPts val="1500"/>
+              </a:lnSpc>
+              <a:buNone/>
+            </a:pPr>
+            <a:r>
+              <a:rPr lang="en-US" sz="1050" dirty="0">
+                <a:solidFill>
+                  <a:srgbClr val="3D4A5C"/>
+                </a:solidFill>
+                <a:latin typeface="맑은 고딕" pitchFamily="34" charset="0"/>
+                <a:ea typeface="맑은 고딕" pitchFamily="34" charset="-122"/>
+                <a:cs typeface="맑은 고딕" pitchFamily="34" charset="-120"/>
+              </a:rPr>
+              <a:t>계속 변합니다</a:t>
+            </a:r>
+            <a:endParaRPr lang="en-US" sz="1050" dirty="0"/>
+          </a:p>
+        </p:txBody>
+      </p:sp>
+      <p:sp>
+        <p:nvSpPr>
+          <p:cNvPr id="11" name="Text 9"/>
+          <p:cNvSpPr/>
+          <p:nvPr/>
+        </p:nvSpPr>
+        <p:spPr>
+          <a:xfrm>
+            <a:off x="3034208" y="2148840"/>
+            <a:ext cx="365760" cy="365760"/>
+          </a:xfrm>
+          <a:prstGeom prst="rect">
+            <a:avLst/>
+          </a:prstGeom>
+          <a:noFill/>
+          <a:ln/>
+        </p:spPr>
+        <p:txBody>
+          <a:bodyPr wrap="square" lIns="0" tIns="0" rIns="0" bIns="0" rtlCol="0" anchor="ctr"/>
+          <a:lstStyle/>
+          <a:p>
+            <a:pPr algn="ctr" indent="0" marL="0">
+              <a:buNone/>
+            </a:pPr>
+            <a:r>
+              <a:rPr lang="en-US" sz="1300" dirty="0">
+                <a:solidFill>
+                  <a:srgbClr val="B9C4D6"/>
+                </a:solidFill>
+                <a:latin typeface="맑은 고딕" pitchFamily="34" charset="0"/>
+                <a:ea typeface="맑은 고딕" pitchFamily="34" charset="-122"/>
+                <a:cs typeface="맑은 고딕" pitchFamily="34" charset="-120"/>
+              </a:rPr>
+              <a:t>▶</a:t>
+            </a:r>
+            <a:endParaRPr lang="en-US" sz="1300" dirty="0"/>
+          </a:p>
+        </p:txBody>
+      </p:sp>
+      <p:sp>
+        <p:nvSpPr>
+          <p:cNvPr id="12" name="Shape 10"/>
+          <p:cNvSpPr/>
+          <p:nvPr/>
+        </p:nvSpPr>
+        <p:spPr>
+          <a:xfrm>
+            <a:off x="3445688" y="1591056"/>
+            <a:ext cx="2421560" cy="1481328"/>
+          </a:xfrm>
+          <a:prstGeom prst="roundRect">
+            <a:avLst>
+              <a:gd name="adj" fmla="val 8642"/>
+            </a:avLst>
+          </a:prstGeom>
+          <a:solidFill>
+            <a:srgbClr val="FFFFFF"/>
+          </a:solidFill>
+          <a:ln w="9525">
+            <a:solidFill>
+              <a:srgbClr val="EDF1F8"/>
+            </a:solidFill>
+            <a:prstDash val="solid"/>
+          </a:ln>
+          <a:effectLst>
+            <a:outerShdw sx="100000" sy="100000" kx="0" ky="0" algn="bl" rotWithShape="0" blurRad="127000" dist="25400" dir="5400000">
+              <a:srgbClr val="9BAAC4">
+                <a:alpha val="22000"/>
+              </a:srgbClr>
+            </a:outerShdw>
+          </a:effectLst>
+        </p:spPr>
+      </p:sp>
+      <p:sp>
+        <p:nvSpPr>
+          <p:cNvPr id="13" name="Shape 11"/>
+          <p:cNvSpPr/>
+          <p:nvPr/>
+        </p:nvSpPr>
+        <p:spPr>
+          <a:xfrm>
+            <a:off x="3683432" y="1773936"/>
+            <a:ext cx="310896" cy="310896"/>
+          </a:xfrm>
+          <a:prstGeom prst="roundRect">
+            <a:avLst>
+              <a:gd name="adj" fmla="val 50000"/>
+            </a:avLst>
+          </a:prstGeom>
+          <a:solidFill>
+            <a:srgbClr val="6E93BF"/>
+          </a:solidFill>
+          <a:ln w="12700">
+            <a:solidFill>
+              <a:srgbClr val="333333"/>
+            </a:solidFill>
+            <a:prstDash val="solid"/>
+          </a:ln>
+        </p:spPr>
+      </p:sp>
+      <p:sp>
+        <p:nvSpPr>
+          <p:cNvPr id="14" name="Text 12"/>
+          <p:cNvSpPr/>
+          <p:nvPr/>
+        </p:nvSpPr>
+        <p:spPr>
+          <a:xfrm>
+            <a:off x="3683432" y="1773936"/>
+            <a:ext cx="310896" cy="310896"/>
+          </a:xfrm>
+          <a:prstGeom prst="rect">
+            <a:avLst/>
+          </a:prstGeom>
+          <a:noFill/>
+          <a:ln/>
+        </p:spPr>
+        <p:txBody>
+          <a:bodyPr wrap="square" lIns="0" tIns="0" rIns="0" bIns="0" rtlCol="0" anchor="ctr"/>
+          <a:lstStyle/>
+          <a:p>
+            <a:pPr algn="ctr" indent="0" marL="0">
+              <a:buNone/>
+            </a:pPr>
+            <a:r>
+              <a:rPr lang="en-US" sz="1100" b="1" dirty="0">
+                <a:solidFill>
+                  <a:srgbClr val="FFFFFF"/>
+                </a:solidFill>
+                <a:latin typeface="맑은 고딕" pitchFamily="34" charset="0"/>
+                <a:ea typeface="맑은 고딕" pitchFamily="34" charset="-122"/>
+                <a:cs typeface="맑은 고딕" pitchFamily="34" charset="-120"/>
+              </a:rPr>
+              <a:t>2</a:t>
+            </a:r>
+            <a:endParaRPr lang="en-US" sz="1100" dirty="0"/>
+          </a:p>
+        </p:txBody>
+      </p:sp>
+      <p:sp>
+        <p:nvSpPr>
+          <p:cNvPr id="15" name="Text 13"/>
+          <p:cNvSpPr/>
+          <p:nvPr/>
+        </p:nvSpPr>
+        <p:spPr>
+          <a:xfrm>
+            <a:off x="4085768" y="1773936"/>
+            <a:ext cx="1543736" cy="310896"/>
+          </a:xfrm>
+          <a:prstGeom prst="rect">
+            <a:avLst/>
+          </a:prstGeom>
+          <a:noFill/>
+          <a:ln/>
+        </p:spPr>
+        <p:txBody>
+          <a:bodyPr wrap="square" lIns="0" tIns="0" rIns="0" bIns="0" rtlCol="0" anchor="ctr"/>
+          <a:lstStyle/>
+          <a:p>
+            <a:pPr indent="0" marL="0">
+              <a:buNone/>
+            </a:pPr>
+            <a:r>
+              <a:rPr lang="en-US" sz="1250" b="1" dirty="0">
+                <a:solidFill>
+                  <a:srgbClr val="1B3A5C"/>
+                </a:solidFill>
+                <a:latin typeface="맑은 고딕" pitchFamily="34" charset="0"/>
+                <a:ea typeface="맑은 고딕" pitchFamily="34" charset="-122"/>
+                <a:cs typeface="맑은 고딕" pitchFamily="34" charset="-120"/>
+              </a:rPr>
+              <a:t>슬러지 발생</a:t>
+            </a:r>
+            <a:endParaRPr lang="en-US" sz="1250" dirty="0"/>
+          </a:p>
+        </p:txBody>
+      </p:sp>
+      <p:sp>
+        <p:nvSpPr>
+          <p:cNvPr id="16" name="Text 14"/>
+          <p:cNvSpPr/>
+          <p:nvPr/>
+        </p:nvSpPr>
+        <p:spPr>
+          <a:xfrm>
+            <a:off x="3683432" y="2194560"/>
+            <a:ext cx="1946072" cy="694944"/>
+          </a:xfrm>
+          <a:prstGeom prst="rect">
+            <a:avLst/>
+          </a:prstGeom>
+          <a:noFill/>
+          <a:ln/>
+        </p:spPr>
+        <p:txBody>
+          <a:bodyPr wrap="square" lIns="0" tIns="0" rIns="0" bIns="0" rtlCol="0" anchor="t"/>
+          <a:lstStyle/>
+          <a:p>
+            <a:pPr indent="0" marL="0">
+              <a:lnSpc>
+                <a:spcPts val="1500"/>
+              </a:lnSpc>
+              <a:buNone/>
+            </a:pPr>
+            <a:r>
+              <a:rPr lang="en-US" sz="1050" dirty="0">
+                <a:solidFill>
+                  <a:srgbClr val="3D4A5C"/>
+                </a:solidFill>
+                <a:latin typeface="맑은 고딕" pitchFamily="34" charset="0"/>
+                <a:ea typeface="맑은 고딕" pitchFamily="34" charset="-122"/>
+                <a:cs typeface="맑은 고딕" pitchFamily="34" charset="-120"/>
+              </a:rPr>
+              <a:t>엔진에 도달하지 못한 연료</a:t>
+            </a:r>
+            <a:endParaRPr lang="en-US" sz="1050" dirty="0"/>
+          </a:p>
+          <a:p>
+            <a:pPr indent="0" marL="0">
+              <a:lnSpc>
+                <a:spcPts val="1500"/>
+              </a:lnSpc>
+              <a:buNone/>
+            </a:pPr>
+            <a:r>
+              <a:rPr lang="en-US" sz="1050" dirty="0">
+                <a:solidFill>
+                  <a:srgbClr val="3D4A5C"/>
+                </a:solidFill>
+                <a:latin typeface="맑은 고딕" pitchFamily="34" charset="0"/>
+                <a:ea typeface="맑은 고딕" pitchFamily="34" charset="-122"/>
+                <a:cs typeface="맑은 고딕" pitchFamily="34" charset="-120"/>
+              </a:rPr>
+              <a:t>— 손실 확정</a:t>
+            </a:r>
+            <a:endParaRPr lang="en-US" sz="1050" dirty="0"/>
+          </a:p>
+        </p:txBody>
+      </p:sp>
+      <p:sp>
+        <p:nvSpPr>
+          <p:cNvPr id="17" name="Text 15"/>
+          <p:cNvSpPr/>
+          <p:nvPr/>
+        </p:nvSpPr>
+        <p:spPr>
+          <a:xfrm>
+            <a:off x="5912968" y="2148840"/>
+            <a:ext cx="365760" cy="365760"/>
+          </a:xfrm>
+          <a:prstGeom prst="rect">
+            <a:avLst/>
+          </a:prstGeom>
+          <a:noFill/>
+          <a:ln/>
+        </p:spPr>
+        <p:txBody>
+          <a:bodyPr wrap="square" lIns="0" tIns="0" rIns="0" bIns="0" rtlCol="0" anchor="ctr"/>
+          <a:lstStyle/>
+          <a:p>
+            <a:pPr algn="ctr" indent="0" marL="0">
+              <a:buNone/>
+            </a:pPr>
+            <a:r>
+              <a:rPr lang="en-US" sz="1300" dirty="0">
+                <a:solidFill>
+                  <a:srgbClr val="B9C4D6"/>
+                </a:solidFill>
+                <a:latin typeface="맑은 고딕" pitchFamily="34" charset="0"/>
+                <a:ea typeface="맑은 고딕" pitchFamily="34" charset="-122"/>
+                <a:cs typeface="맑은 고딕" pitchFamily="34" charset="-120"/>
+              </a:rPr>
+              <a:t>▶</a:t>
+            </a:r>
+            <a:endParaRPr lang="en-US" sz="1300" dirty="0"/>
+          </a:p>
+        </p:txBody>
+      </p:sp>
+      <p:sp>
+        <p:nvSpPr>
+          <p:cNvPr id="18" name="Shape 16"/>
+          <p:cNvSpPr/>
+          <p:nvPr/>
+        </p:nvSpPr>
+        <p:spPr>
+          <a:xfrm>
+            <a:off x="6324448" y="1591056"/>
+            <a:ext cx="2421560" cy="1481328"/>
+          </a:xfrm>
+          <a:prstGeom prst="roundRect">
+            <a:avLst>
+              <a:gd name="adj" fmla="val 8642"/>
+            </a:avLst>
+          </a:prstGeom>
+          <a:solidFill>
+            <a:srgbClr val="FFFFFF"/>
+          </a:solidFill>
+          <a:ln w="9525">
+            <a:solidFill>
+              <a:srgbClr val="EDF1F8"/>
+            </a:solidFill>
+            <a:prstDash val="solid"/>
+          </a:ln>
+          <a:effectLst>
+            <a:outerShdw sx="100000" sy="100000" kx="0" ky="0" algn="bl" rotWithShape="0" blurRad="127000" dist="25400" dir="5400000">
+              <a:srgbClr val="9BAAC4">
+                <a:alpha val="22000"/>
+              </a:srgbClr>
+            </a:outerShdw>
+          </a:effectLst>
+        </p:spPr>
+      </p:sp>
+      <p:sp>
+        <p:nvSpPr>
+          <p:cNvPr id="19" name="Shape 17"/>
+          <p:cNvSpPr/>
+          <p:nvPr/>
+        </p:nvSpPr>
+        <p:spPr>
+          <a:xfrm>
+            <a:off x="6562192" y="1773936"/>
+            <a:ext cx="310896" cy="310896"/>
+          </a:xfrm>
+          <a:prstGeom prst="roundRect">
+            <a:avLst>
+              <a:gd name="adj" fmla="val 50000"/>
+            </a:avLst>
+          </a:prstGeom>
+          <a:solidFill>
+            <a:srgbClr val="E17B34"/>
+          </a:solidFill>
+          <a:ln w="12700">
+            <a:solidFill>
+              <a:srgbClr val="333333"/>
+            </a:solidFill>
+            <a:prstDash val="solid"/>
+          </a:ln>
+        </p:spPr>
+      </p:sp>
+      <p:sp>
+        <p:nvSpPr>
+          <p:cNvPr id="20" name="Text 18"/>
+          <p:cNvSpPr/>
+          <p:nvPr/>
+        </p:nvSpPr>
+        <p:spPr>
+          <a:xfrm>
+            <a:off x="6562192" y="1773936"/>
+            <a:ext cx="310896" cy="310896"/>
+          </a:xfrm>
+          <a:prstGeom prst="rect">
+            <a:avLst/>
+          </a:prstGeom>
+          <a:noFill/>
+          <a:ln/>
+        </p:spPr>
+        <p:txBody>
+          <a:bodyPr wrap="square" lIns="0" tIns="0" rIns="0" bIns="0" rtlCol="0" anchor="ctr"/>
+          <a:lstStyle/>
+          <a:p>
+            <a:pPr algn="ctr" indent="0" marL="0">
+              <a:buNone/>
+            </a:pPr>
+            <a:r>
+              <a:rPr lang="en-US" sz="1100" b="1" dirty="0">
+                <a:solidFill>
+                  <a:srgbClr val="FFFFFF"/>
+                </a:solidFill>
+                <a:latin typeface="맑은 고딕" pitchFamily="34" charset="0"/>
+                <a:ea typeface="맑은 고딕" pitchFamily="34" charset="-122"/>
+                <a:cs typeface="맑은 고딕" pitchFamily="34" charset="-120"/>
+              </a:rPr>
+              <a:t>3</a:t>
+            </a:r>
+            <a:endParaRPr lang="en-US" sz="1100" dirty="0"/>
+          </a:p>
+        </p:txBody>
+      </p:sp>
+      <p:sp>
+        <p:nvSpPr>
+          <p:cNvPr id="21" name="Text 19"/>
+          <p:cNvSpPr/>
+          <p:nvPr/>
+        </p:nvSpPr>
+        <p:spPr>
+          <a:xfrm>
+            <a:off x="6964528" y="1773936"/>
+            <a:ext cx="1543736" cy="310896"/>
+          </a:xfrm>
+          <a:prstGeom prst="rect">
+            <a:avLst/>
+          </a:prstGeom>
+          <a:noFill/>
+          <a:ln/>
+        </p:spPr>
+        <p:txBody>
+          <a:bodyPr wrap="square" lIns="0" tIns="0" rIns="0" bIns="0" rtlCol="0" anchor="ctr"/>
+          <a:lstStyle/>
+          <a:p>
+            <a:pPr indent="0" marL="0">
+              <a:buNone/>
+            </a:pPr>
+            <a:r>
+              <a:rPr lang="en-US" sz="1250" b="1" dirty="0">
+                <a:solidFill>
+                  <a:srgbClr val="1B3A5C"/>
+                </a:solidFill>
+                <a:latin typeface="맑은 고딕" pitchFamily="34" charset="0"/>
+                <a:ea typeface="맑은 고딕" pitchFamily="34" charset="-122"/>
+                <a:cs typeface="맑은 고딕" pitchFamily="34" charset="-120"/>
+              </a:rPr>
+              <a:t>연소 품질 저하</a:t>
+            </a:r>
+            <a:endParaRPr lang="en-US" sz="1250" dirty="0"/>
+          </a:p>
+        </p:txBody>
+      </p:sp>
+      <p:sp>
+        <p:nvSpPr>
+          <p:cNvPr id="22" name="Text 20"/>
+          <p:cNvSpPr/>
+          <p:nvPr/>
+        </p:nvSpPr>
+        <p:spPr>
+          <a:xfrm>
+            <a:off x="6562192" y="2194560"/>
+            <a:ext cx="1946072" cy="694944"/>
+          </a:xfrm>
+          <a:prstGeom prst="rect">
+            <a:avLst/>
+          </a:prstGeom>
+          <a:noFill/>
+          <a:ln/>
+        </p:spPr>
+        <p:txBody>
+          <a:bodyPr wrap="square" lIns="0" tIns="0" rIns="0" bIns="0" rtlCol="0" anchor="t"/>
+          <a:lstStyle/>
+          <a:p>
+            <a:pPr indent="0" marL="0">
+              <a:lnSpc>
+                <a:spcPts val="1500"/>
+              </a:lnSpc>
+              <a:buNone/>
+            </a:pPr>
+            <a:r>
+              <a:rPr lang="en-US" sz="1050" dirty="0">
+                <a:solidFill>
+                  <a:srgbClr val="3D4A5C"/>
+                </a:solidFill>
+                <a:latin typeface="맑은 고딕" pitchFamily="34" charset="0"/>
+                <a:ea typeface="맑은 고딕" pitchFamily="34" charset="-122"/>
+                <a:cs typeface="맑은 고딕" pitchFamily="34" charset="-120"/>
+              </a:rPr>
+              <a:t>착화 불량 · 매연 증가</a:t>
+            </a:r>
+            <a:endParaRPr lang="en-US" sz="1050" dirty="0"/>
+          </a:p>
+        </p:txBody>
+      </p:sp>
+      <p:sp>
+        <p:nvSpPr>
+          <p:cNvPr id="23" name="Text 21"/>
+          <p:cNvSpPr/>
+          <p:nvPr/>
+        </p:nvSpPr>
+        <p:spPr>
+          <a:xfrm>
+            <a:off x="8791727" y="2148840"/>
+            <a:ext cx="365760" cy="365760"/>
+          </a:xfrm>
+          <a:prstGeom prst="rect">
+            <a:avLst/>
+          </a:prstGeom>
+          <a:noFill/>
+          <a:ln/>
+        </p:spPr>
+        <p:txBody>
+          <a:bodyPr wrap="square" lIns="0" tIns="0" rIns="0" bIns="0" rtlCol="0" anchor="ctr"/>
+          <a:lstStyle/>
+          <a:p>
+            <a:pPr algn="ctr" indent="0" marL="0">
+              <a:buNone/>
+            </a:pPr>
+            <a:r>
+              <a:rPr lang="en-US" sz="1300" dirty="0">
+                <a:solidFill>
+                  <a:srgbClr val="B9C4D6"/>
+                </a:solidFill>
+                <a:latin typeface="맑은 고딕" pitchFamily="34" charset="0"/>
+                <a:ea typeface="맑은 고딕" pitchFamily="34" charset="-122"/>
+                <a:cs typeface="맑은 고딕" pitchFamily="34" charset="-120"/>
+              </a:rPr>
+              <a:t>▶</a:t>
+            </a:r>
+            <a:endParaRPr lang="en-US" sz="1300" dirty="0"/>
+          </a:p>
+        </p:txBody>
+      </p:sp>
+      <p:sp>
+        <p:nvSpPr>
+          <p:cNvPr id="24" name="Shape 22"/>
+          <p:cNvSpPr/>
+          <p:nvPr/>
+        </p:nvSpPr>
+        <p:spPr>
+          <a:xfrm>
+            <a:off x="9203207" y="1591056"/>
+            <a:ext cx="2421560" cy="1481328"/>
+          </a:xfrm>
+          <a:prstGeom prst="roundRect">
+            <a:avLst>
+              <a:gd name="adj" fmla="val 8642"/>
+            </a:avLst>
+          </a:prstGeom>
+          <a:solidFill>
+            <a:srgbClr val="FFFFFF"/>
+          </a:solidFill>
+          <a:ln w="9525">
+            <a:solidFill>
+              <a:srgbClr val="EDF1F8"/>
+            </a:solidFill>
+            <a:prstDash val="solid"/>
+          </a:ln>
+          <a:effectLst>
+            <a:outerShdw sx="100000" sy="100000" kx="0" ky="0" algn="bl" rotWithShape="0" blurRad="127000" dist="25400" dir="5400000">
+              <a:srgbClr val="9BAAC4">
+                <a:alpha val="22000"/>
+              </a:srgbClr>
+            </a:outerShdw>
+          </a:effectLst>
+        </p:spPr>
+      </p:sp>
+      <p:sp>
+        <p:nvSpPr>
+          <p:cNvPr id="25" name="Shape 23"/>
+          <p:cNvSpPr/>
+          <p:nvPr/>
+        </p:nvSpPr>
+        <p:spPr>
+          <a:xfrm>
+            <a:off x="9440951" y="1773936"/>
+            <a:ext cx="310896" cy="310896"/>
+          </a:xfrm>
+          <a:prstGeom prst="roundRect">
+            <a:avLst>
+              <a:gd name="adj" fmla="val 50000"/>
+            </a:avLst>
+          </a:prstGeom>
+          <a:solidFill>
+            <a:srgbClr val="C0392B"/>
+          </a:solidFill>
+          <a:ln w="12700">
+            <a:solidFill>
+              <a:srgbClr val="333333"/>
+            </a:solidFill>
+            <a:prstDash val="solid"/>
+          </a:ln>
+        </p:spPr>
+      </p:sp>
+      <p:sp>
+        <p:nvSpPr>
+          <p:cNvPr id="26" name="Text 24"/>
+          <p:cNvSpPr/>
+          <p:nvPr/>
+        </p:nvSpPr>
+        <p:spPr>
+          <a:xfrm>
+            <a:off x="9440951" y="1773936"/>
+            <a:ext cx="310896" cy="310896"/>
+          </a:xfrm>
+          <a:prstGeom prst="rect">
+            <a:avLst/>
+          </a:prstGeom>
+          <a:noFill/>
+          <a:ln/>
+        </p:spPr>
+        <p:txBody>
+          <a:bodyPr wrap="square" lIns="0" tIns="0" rIns="0" bIns="0" rtlCol="0" anchor="ctr"/>
+          <a:lstStyle/>
+          <a:p>
+            <a:pPr algn="ctr" indent="0" marL="0">
+              <a:buNone/>
+            </a:pPr>
+            <a:r>
+              <a:rPr lang="en-US" sz="1100" b="1" dirty="0">
+                <a:solidFill>
+                  <a:srgbClr val="FFFFFF"/>
+                </a:solidFill>
+                <a:latin typeface="맑은 고딕" pitchFamily="34" charset="0"/>
+                <a:ea typeface="맑은 고딕" pitchFamily="34" charset="-122"/>
+                <a:cs typeface="맑은 고딕" pitchFamily="34" charset="-120"/>
+              </a:rPr>
+              <a:t>4</a:t>
+            </a:r>
+            <a:endParaRPr lang="en-US" sz="1100" dirty="0"/>
+          </a:p>
+        </p:txBody>
+      </p:sp>
+      <p:sp>
+        <p:nvSpPr>
+          <p:cNvPr id="27" name="Text 25"/>
+          <p:cNvSpPr/>
+          <p:nvPr/>
+        </p:nvSpPr>
+        <p:spPr>
+          <a:xfrm>
+            <a:off x="9843287" y="1773936"/>
+            <a:ext cx="1543736" cy="310896"/>
+          </a:xfrm>
+          <a:prstGeom prst="rect">
+            <a:avLst/>
+          </a:prstGeom>
+          <a:noFill/>
+          <a:ln/>
+        </p:spPr>
+        <p:txBody>
+          <a:bodyPr wrap="square" lIns="0" tIns="0" rIns="0" bIns="0" rtlCol="0" anchor="ctr"/>
+          <a:lstStyle/>
+          <a:p>
+            <a:pPr indent="0" marL="0">
+              <a:buNone/>
+            </a:pPr>
+            <a:r>
+              <a:rPr lang="en-US" sz="1250" b="1" dirty="0">
+                <a:solidFill>
+                  <a:srgbClr val="1B3A5C"/>
+                </a:solidFill>
+                <a:latin typeface="맑은 고딕" pitchFamily="34" charset="0"/>
+                <a:ea typeface="맑은 고딕" pitchFamily="34" charset="-122"/>
+                <a:cs typeface="맑은 고딕" pitchFamily="34" charset="-120"/>
+              </a:rPr>
+              <a:t>열회수면 퇴적</a:t>
+            </a:r>
+            <a:endParaRPr lang="en-US" sz="1250" dirty="0"/>
+          </a:p>
+        </p:txBody>
+      </p:sp>
+      <p:sp>
+        <p:nvSpPr>
+          <p:cNvPr id="28" name="Text 26"/>
+          <p:cNvSpPr/>
+          <p:nvPr/>
+        </p:nvSpPr>
+        <p:spPr>
+          <a:xfrm>
+            <a:off x="9440951" y="2194560"/>
+            <a:ext cx="1946072" cy="694944"/>
+          </a:xfrm>
+          <a:prstGeom prst="rect">
+            <a:avLst/>
+          </a:prstGeom>
+          <a:noFill/>
+          <a:ln/>
+        </p:spPr>
+        <p:txBody>
+          <a:bodyPr wrap="square" lIns="0" tIns="0" rIns="0" bIns="0" rtlCol="0" anchor="t"/>
+          <a:lstStyle/>
+          <a:p>
+            <a:pPr indent="0" marL="0">
+              <a:lnSpc>
+                <a:spcPts val="1500"/>
+              </a:lnSpc>
+              <a:buNone/>
+            </a:pPr>
+            <a:r>
+              <a:rPr lang="en-US" sz="1050" dirty="0">
+                <a:solidFill>
+                  <a:srgbClr val="3D4A5C"/>
+                </a:solidFill>
+                <a:latin typeface="맑은 고딕" pitchFamily="34" charset="0"/>
+                <a:ea typeface="맑은 고딕" pitchFamily="34" charset="-122"/>
+                <a:cs typeface="맑은 고딕" pitchFamily="34" charset="-120"/>
+              </a:rPr>
+              <a:t>이후 모든 연소 사이클의</a:t>
+            </a:r>
+            <a:endParaRPr lang="en-US" sz="1050" dirty="0"/>
+          </a:p>
+          <a:p>
+            <a:pPr indent="0" marL="0">
+              <a:lnSpc>
+                <a:spcPts val="1500"/>
+              </a:lnSpc>
+              <a:buNone/>
+            </a:pPr>
+            <a:r>
+              <a:rPr lang="en-US" sz="1050" dirty="0">
+                <a:solidFill>
+                  <a:srgbClr val="3D4A5C"/>
+                </a:solidFill>
+                <a:latin typeface="맑은 고딕" pitchFamily="34" charset="0"/>
+                <a:ea typeface="맑은 고딕" pitchFamily="34" charset="-122"/>
+                <a:cs typeface="맑은 고딕" pitchFamily="34" charset="-120"/>
+              </a:rPr>
+              <a:t>효율이 함께 떨어집니다</a:t>
+            </a:r>
+            <a:endParaRPr lang="en-US" sz="1050" dirty="0"/>
+          </a:p>
+        </p:txBody>
+      </p:sp>
+      <p:sp>
+        <p:nvSpPr>
+          <p:cNvPr id="29" name="Shape 27"/>
+          <p:cNvSpPr/>
+          <p:nvPr/>
+        </p:nvSpPr>
+        <p:spPr>
+          <a:xfrm>
+            <a:off x="566928" y="3273552"/>
+            <a:ext cx="5358384" cy="1700784"/>
+          </a:xfrm>
+          <a:prstGeom prst="roundRect">
+            <a:avLst>
+              <a:gd name="adj" fmla="val 7527"/>
+            </a:avLst>
+          </a:prstGeom>
+          <a:solidFill>
+            <a:srgbClr val="1B3A5C"/>
+          </a:solidFill>
+          <a:ln w="9525">
+            <a:solidFill>
+              <a:srgbClr val="1B3A5C"/>
+            </a:solidFill>
+            <a:prstDash val="solid"/>
+          </a:ln>
+          <a:effectLst>
+            <a:outerShdw sx="100000" sy="100000" kx="0" ky="0" algn="bl" rotWithShape="0" blurRad="127000" dist="25400" dir="5400000">
+              <a:srgbClr val="9BAAC4">
+                <a:alpha val="22000"/>
+              </a:srgbClr>
+            </a:outerShdw>
+          </a:effectLst>
+        </p:spPr>
+      </p:sp>
+      <p:sp>
+        <p:nvSpPr>
+          <p:cNvPr id="30" name="Text 28"/>
+          <p:cNvSpPr/>
+          <p:nvPr/>
+        </p:nvSpPr>
+        <p:spPr>
+          <a:xfrm>
+            <a:off x="841248" y="3474720"/>
+            <a:ext cx="4809744" cy="310896"/>
+          </a:xfrm>
+          <a:prstGeom prst="rect">
+            <a:avLst/>
+          </a:prstGeom>
+          <a:noFill/>
+          <a:ln/>
+        </p:spPr>
+        <p:txBody>
+          <a:bodyPr wrap="square" lIns="0" tIns="0" rIns="0" bIns="0" rtlCol="0" anchor="ctr"/>
+          <a:lstStyle/>
+          <a:p>
+            <a:pPr indent="0" marL="0">
+              <a:buNone/>
+            </a:pPr>
+            <a:r>
+              <a:rPr lang="en-US" sz="1400" b="1" dirty="0">
+                <a:solidFill>
+                  <a:srgbClr val="E17B34"/>
+                </a:solidFill>
+                <a:latin typeface="맑은 고딕" pitchFamily="34" charset="0"/>
+                <a:ea typeface="맑은 고딕" pitchFamily="34" charset="-122"/>
+                <a:cs typeface="맑은 고딕" pitchFamily="34" charset="-120"/>
+              </a:rPr>
+              <a:t>그래서 한 곳만 손봐서는 안 됩니다</a:t>
+            </a:r>
+            <a:endParaRPr lang="en-US" sz="1400" dirty="0"/>
+          </a:p>
+        </p:txBody>
+      </p:sp>
+      <p:sp>
+        <p:nvSpPr>
+          <p:cNvPr id="31" name="Text 29"/>
+          <p:cNvSpPr/>
+          <p:nvPr/>
+        </p:nvSpPr>
+        <p:spPr>
+          <a:xfrm>
+            <a:off x="841248" y="3840480"/>
+            <a:ext cx="4809744" cy="1005840"/>
+          </a:xfrm>
+          <a:prstGeom prst="rect">
+            <a:avLst/>
+          </a:prstGeom>
+          <a:noFill/>
+          <a:ln/>
+        </p:spPr>
+        <p:txBody>
+          <a:bodyPr wrap="square" lIns="0" tIns="0" rIns="0" bIns="0" rtlCol="0" anchor="t"/>
+          <a:lstStyle/>
+          <a:p>
+            <a:pPr indent="0" marL="0">
+              <a:lnSpc>
+                <a:spcPts val="1700"/>
+              </a:lnSpc>
+              <a:buNone/>
+            </a:pPr>
+            <a:r>
+              <a:rPr lang="en-US" sz="1150" dirty="0">
+                <a:solidFill>
+                  <a:srgbClr val="FFFFFF"/>
+                </a:solidFill>
+                <a:latin typeface="맑은 고딕" pitchFamily="34" charset="0"/>
+                <a:ea typeface="맑은 고딕" pitchFamily="34" charset="-122"/>
+                <a:cs typeface="맑은 고딕" pitchFamily="34" charset="-120"/>
+              </a:rPr>
+              <a:t>앞 단계의 손실이 뒤 단계의 손실로 그대로 넘어갑니다. </a:t>
+            </a:r>
+            <a:endParaRPr lang="en-US" sz="1150" dirty="0"/>
+          </a:p>
+          <a:p>
+            <a:pPr indent="0" marL="0">
+              <a:lnSpc>
+                <a:spcPts val="1700"/>
+              </a:lnSpc>
+              <a:buNone/>
+            </a:pPr>
+            <a:r>
+              <a:rPr lang="en-US" sz="1150" dirty="0">
+                <a:solidFill>
+                  <a:srgbClr val="D6E0EE"/>
+                </a:solidFill>
+                <a:latin typeface="맑은 고딕" pitchFamily="34" charset="0"/>
+                <a:ea typeface="맑은 고딕" pitchFamily="34" charset="-122"/>
+                <a:cs typeface="맑은 고딕" pitchFamily="34" charset="-120"/>
+              </a:rPr>
+              <a:t>저장에서 잃은 연료는 연소에서 되찾을 수 없고, 연소에서 만든 매연은 열회수 효율을 계속 갉아먹습니다.</a:t>
+            </a:r>
+            <a:endParaRPr lang="en-US" sz="1150" dirty="0"/>
+          </a:p>
+          <a:p>
+            <a:pPr indent="0" marL="0">
+              <a:lnSpc>
+                <a:spcPts val="1700"/>
+              </a:lnSpc>
+              <a:buNone/>
+            </a:pPr>
+            <a:r>
+              <a:rPr lang="en-US" sz="700" dirty="0">
+                <a:solidFill>
+                  <a:srgbClr val="000000"/>
+                </a:solidFill>
+              </a:rPr>
+              <a:t> </a:t>
+            </a:r>
+            <a:endParaRPr lang="en-US" sz="1150" dirty="0"/>
+          </a:p>
+          <a:p>
+            <a:pPr indent="0" marL="0">
+              <a:lnSpc>
+                <a:spcPts val="1700"/>
+              </a:lnSpc>
+              <a:buNone/>
+            </a:pPr>
+            <a:r>
+              <a:rPr lang="en-US" sz="1150" b="1" dirty="0">
+                <a:solidFill>
+                  <a:srgbClr val="FFFFFF"/>
+                </a:solidFill>
+                <a:latin typeface="맑은 고딕" pitchFamily="34" charset="0"/>
+                <a:ea typeface="맑은 고딕" pitchFamily="34" charset="-122"/>
+                <a:cs typeface="맑은 고딕" pitchFamily="34" charset="-120"/>
+              </a:rPr>
+              <a:t>계통은 서로 연결되어 있고, 하나로 관리할 때 반응합니다.</a:t>
+            </a:r>
+            <a:endParaRPr lang="en-US" sz="1150" dirty="0"/>
+          </a:p>
+        </p:txBody>
+      </p:sp>
+      <p:sp>
+        <p:nvSpPr>
+          <p:cNvPr id="32" name="Shape 30"/>
+          <p:cNvSpPr/>
+          <p:nvPr/>
+        </p:nvSpPr>
+        <p:spPr>
+          <a:xfrm>
+            <a:off x="6263640" y="3273552"/>
+            <a:ext cx="5358384" cy="1700784"/>
+          </a:xfrm>
+          <a:prstGeom prst="roundRect">
+            <a:avLst>
+              <a:gd name="adj" fmla="val 7527"/>
+            </a:avLst>
+          </a:prstGeom>
+          <a:solidFill>
+            <a:srgbClr val="FFFFFF"/>
+          </a:solidFill>
+          <a:ln w="9525">
+            <a:solidFill>
+              <a:srgbClr val="EDF1F8"/>
+            </a:solidFill>
+            <a:prstDash val="solid"/>
+          </a:ln>
+          <a:effectLst>
+            <a:outerShdw sx="100000" sy="100000" kx="0" ky="0" algn="bl" rotWithShape="0" blurRad="127000" dist="25400" dir="5400000">
+              <a:srgbClr val="9BAAC4">
+                <a:alpha val="22000"/>
+              </a:srgbClr>
+            </a:outerShdw>
+          </a:effectLst>
+        </p:spPr>
+      </p:sp>
+      <p:sp>
+        <p:nvSpPr>
+          <p:cNvPr id="33" name="Text 31"/>
+          <p:cNvSpPr/>
+          <p:nvPr/>
+        </p:nvSpPr>
+        <p:spPr>
+          <a:xfrm>
+            <a:off x="6519672" y="3456432"/>
+            <a:ext cx="4846320" cy="219456"/>
+          </a:xfrm>
+          <a:prstGeom prst="rect">
+            <a:avLst/>
+          </a:prstGeom>
+          <a:noFill/>
+          <a:ln/>
+        </p:spPr>
+        <p:txBody>
+          <a:bodyPr wrap="square" lIns="0" tIns="0" rIns="0" bIns="0" rtlCol="0" anchor="ctr"/>
+          <a:lstStyle/>
+          <a:p>
+            <a:pPr indent="0" marL="0">
+              <a:buNone/>
+            </a:pPr>
+            <a:r>
+              <a:rPr lang="en-US" sz="950" b="1" spc="180" kern="0" dirty="0">
+                <a:solidFill>
+                  <a:srgbClr val="2E5C8A"/>
+                </a:solidFill>
+                <a:latin typeface="맑은 고딕" pitchFamily="34" charset="0"/>
+                <a:ea typeface="맑은 고딕" pitchFamily="34" charset="-122"/>
+                <a:cs typeface="맑은 고딕" pitchFamily="34" charset="-120"/>
+              </a:rPr>
+              <a:t>WHAT INTEGRATED MANAGEMENT DELIVERS</a:t>
+            </a:r>
+            <a:endParaRPr lang="en-US" sz="950" dirty="0"/>
+          </a:p>
+        </p:txBody>
+      </p:sp>
+      <p:sp>
+        <p:nvSpPr>
+          <p:cNvPr id="34" name="Shape 32"/>
+          <p:cNvSpPr/>
+          <p:nvPr/>
+        </p:nvSpPr>
+        <p:spPr>
+          <a:xfrm>
+            <a:off x="6519672" y="3813048"/>
+            <a:ext cx="118872" cy="118872"/>
+          </a:xfrm>
+          <a:prstGeom prst="roundRect">
+            <a:avLst>
+              <a:gd name="adj" fmla="val 50000"/>
+            </a:avLst>
+          </a:prstGeom>
+          <a:solidFill>
+            <a:srgbClr val="2E7D5B"/>
+          </a:solidFill>
+          <a:ln w="12700">
+            <a:solidFill>
+              <a:srgbClr val="333333"/>
+            </a:solidFill>
+            <a:prstDash val="solid"/>
+          </a:ln>
+        </p:spPr>
+      </p:sp>
+      <p:sp>
+        <p:nvSpPr>
+          <p:cNvPr id="35" name="Text 33"/>
+          <p:cNvSpPr/>
+          <p:nvPr/>
+        </p:nvSpPr>
+        <p:spPr>
+          <a:xfrm>
+            <a:off x="6739128" y="3730752"/>
+            <a:ext cx="2231136" cy="292608"/>
+          </a:xfrm>
+          <a:prstGeom prst="rect">
+            <a:avLst/>
+          </a:prstGeom>
+          <a:noFill/>
+          <a:ln/>
+        </p:spPr>
+        <p:txBody>
+          <a:bodyPr wrap="square" lIns="0" tIns="0" rIns="0" bIns="0" rtlCol="0" anchor="ctr"/>
+          <a:lstStyle/>
+          <a:p>
+            <a:pPr indent="0" marL="0">
+              <a:buNone/>
+            </a:pPr>
+            <a:r>
+              <a:rPr lang="en-US" sz="1050" b="1" dirty="0">
+                <a:solidFill>
+                  <a:srgbClr val="1B3A5C"/>
+                </a:solidFill>
+                <a:latin typeface="맑은 고딕" pitchFamily="34" charset="0"/>
+                <a:ea typeface="맑은 고딕" pitchFamily="34" charset="-122"/>
+                <a:cs typeface="맑은 고딕" pitchFamily="34" charset="-120"/>
+              </a:rPr>
+              <a:t>슬러지 손실 감소  </a:t>
+            </a:r>
+            <a:pPr indent="0" marL="0">
+              <a:buNone/>
+            </a:pPr>
+            <a:r>
+              <a:rPr lang="en-US" sz="900" dirty="0">
+                <a:solidFill>
+                  <a:srgbClr val="8A94A6"/>
+                </a:solidFill>
+                <a:latin typeface="맑은 고딕" pitchFamily="34" charset="0"/>
+                <a:ea typeface="맑은 고딕" pitchFamily="34" charset="-122"/>
+                <a:cs typeface="맑은 고딕" pitchFamily="34" charset="-120"/>
+              </a:rPr>
+              <a:t>폐기 연료 ↓</a:t>
+            </a:r>
+            <a:endParaRPr lang="en-US" sz="1050" dirty="0"/>
+          </a:p>
+        </p:txBody>
+      </p:sp>
+      <p:sp>
+        <p:nvSpPr>
+          <p:cNvPr id="36" name="Shape 34"/>
+          <p:cNvSpPr/>
+          <p:nvPr/>
+        </p:nvSpPr>
+        <p:spPr>
+          <a:xfrm>
+            <a:off x="8970264" y="3813048"/>
+            <a:ext cx="118872" cy="118872"/>
+          </a:xfrm>
+          <a:prstGeom prst="roundRect">
+            <a:avLst>
+              <a:gd name="adj" fmla="val 50000"/>
+            </a:avLst>
+          </a:prstGeom>
+          <a:solidFill>
+            <a:srgbClr val="2E7D5B"/>
+          </a:solidFill>
+          <a:ln w="12700">
+            <a:solidFill>
+              <a:srgbClr val="333333"/>
+            </a:solidFill>
+            <a:prstDash val="solid"/>
+          </a:ln>
+        </p:spPr>
+      </p:sp>
+      <p:sp>
+        <p:nvSpPr>
+          <p:cNvPr id="37" name="Text 35"/>
+          <p:cNvSpPr/>
+          <p:nvPr/>
+        </p:nvSpPr>
+        <p:spPr>
+          <a:xfrm>
+            <a:off x="9189720" y="3730752"/>
+            <a:ext cx="2231136" cy="292608"/>
+          </a:xfrm>
+          <a:prstGeom prst="rect">
+            <a:avLst/>
+          </a:prstGeom>
+          <a:noFill/>
+          <a:ln/>
+        </p:spPr>
+        <p:txBody>
+          <a:bodyPr wrap="square" lIns="0" tIns="0" rIns="0" bIns="0" rtlCol="0" anchor="ctr"/>
+          <a:lstStyle/>
+          <a:p>
+            <a:pPr indent="0" marL="0">
+              <a:buNone/>
+            </a:pPr>
+            <a:r>
+              <a:rPr lang="en-US" sz="1050" b="1" dirty="0">
+                <a:solidFill>
+                  <a:srgbClr val="1B3A5C"/>
+                </a:solidFill>
+                <a:latin typeface="맑은 고딕" pitchFamily="34" charset="0"/>
+                <a:ea typeface="맑은 고딕" pitchFamily="34" charset="-122"/>
+                <a:cs typeface="맑은 고딕" pitchFamily="34" charset="-120"/>
+              </a:rPr>
+              <a:t>SFOC 저하  </a:t>
+            </a:r>
+            <a:pPr indent="0" marL="0">
+              <a:buNone/>
+            </a:pPr>
+            <a:r>
+              <a:rPr lang="en-US" sz="900" dirty="0">
+                <a:solidFill>
+                  <a:srgbClr val="8A94A6"/>
+                </a:solidFill>
+                <a:latin typeface="맑은 고딕" pitchFamily="34" charset="0"/>
+                <a:ea typeface="맑은 고딕" pitchFamily="34" charset="-122"/>
+                <a:cs typeface="맑은 고딕" pitchFamily="34" charset="-120"/>
+              </a:rPr>
+              <a:t>같은 출력에 연료 ↓</a:t>
+            </a:r>
+            <a:endParaRPr lang="en-US" sz="1050" dirty="0"/>
+          </a:p>
+        </p:txBody>
+      </p:sp>
+      <p:sp>
+        <p:nvSpPr>
+          <p:cNvPr id="38" name="Shape 36"/>
+          <p:cNvSpPr/>
+          <p:nvPr/>
+        </p:nvSpPr>
+        <p:spPr>
+          <a:xfrm>
+            <a:off x="6519672" y="4215384"/>
+            <a:ext cx="118872" cy="118872"/>
+          </a:xfrm>
+          <a:prstGeom prst="roundRect">
+            <a:avLst>
+              <a:gd name="adj" fmla="val 50000"/>
+            </a:avLst>
+          </a:prstGeom>
+          <a:solidFill>
+            <a:srgbClr val="2E7D5B"/>
+          </a:solidFill>
+          <a:ln w="12700">
+            <a:solidFill>
+              <a:srgbClr val="333333"/>
+            </a:solidFill>
+            <a:prstDash val="solid"/>
+          </a:ln>
+        </p:spPr>
+      </p:sp>
+      <p:sp>
+        <p:nvSpPr>
+          <p:cNvPr id="39" name="Text 37"/>
+          <p:cNvSpPr/>
+          <p:nvPr/>
+        </p:nvSpPr>
+        <p:spPr>
+          <a:xfrm>
+            <a:off x="6739128" y="4133088"/>
+            <a:ext cx="2231136" cy="292608"/>
+          </a:xfrm>
+          <a:prstGeom prst="rect">
+            <a:avLst/>
+          </a:prstGeom>
+          <a:noFill/>
+          <a:ln/>
+        </p:spPr>
+        <p:txBody>
+          <a:bodyPr wrap="square" lIns="0" tIns="0" rIns="0" bIns="0" rtlCol="0" anchor="ctr"/>
+          <a:lstStyle/>
+          <a:p>
+            <a:pPr indent="0" marL="0">
+              <a:buNone/>
+            </a:pPr>
+            <a:r>
+              <a:rPr lang="en-US" sz="1050" b="1" dirty="0">
+                <a:solidFill>
+                  <a:srgbClr val="1B3A5C"/>
+                </a:solidFill>
+                <a:latin typeface="맑은 고딕" pitchFamily="34" charset="0"/>
+                <a:ea typeface="맑은 고딕" pitchFamily="34" charset="-122"/>
+                <a:cs typeface="맑은 고딕" pitchFamily="34" charset="-120"/>
+              </a:rPr>
+              <a:t>비계획 정비 감소  </a:t>
+            </a:r>
+            <a:pPr indent="0" marL="0">
+              <a:buNone/>
+            </a:pPr>
+            <a:r>
+              <a:rPr lang="en-US" sz="900" dirty="0">
+                <a:solidFill>
+                  <a:srgbClr val="8A94A6"/>
+                </a:solidFill>
+                <a:latin typeface="맑은 고딕" pitchFamily="34" charset="0"/>
+                <a:ea typeface="맑은 고딕" pitchFamily="34" charset="-122"/>
+                <a:cs typeface="맑은 고딕" pitchFamily="34" charset="-120"/>
+              </a:rPr>
+              <a:t>정유기 · 필터 · 펌프</a:t>
+            </a:r>
+            <a:endParaRPr lang="en-US" sz="1050" dirty="0"/>
+          </a:p>
+        </p:txBody>
+      </p:sp>
+      <p:sp>
+        <p:nvSpPr>
+          <p:cNvPr id="40" name="Shape 38"/>
+          <p:cNvSpPr/>
+          <p:nvPr/>
+        </p:nvSpPr>
+        <p:spPr>
+          <a:xfrm>
+            <a:off x="8970264" y="4215384"/>
+            <a:ext cx="118872" cy="118872"/>
+          </a:xfrm>
+          <a:prstGeom prst="roundRect">
+            <a:avLst>
+              <a:gd name="adj" fmla="val 50000"/>
+            </a:avLst>
+          </a:prstGeom>
+          <a:solidFill>
+            <a:srgbClr val="2E7D5B"/>
+          </a:solidFill>
+          <a:ln w="12700">
+            <a:solidFill>
+              <a:srgbClr val="333333"/>
+            </a:solidFill>
+            <a:prstDash val="solid"/>
+          </a:ln>
+        </p:spPr>
+      </p:sp>
+      <p:sp>
+        <p:nvSpPr>
+          <p:cNvPr id="41" name="Text 39"/>
+          <p:cNvSpPr/>
+          <p:nvPr/>
+        </p:nvSpPr>
+        <p:spPr>
+          <a:xfrm>
+            <a:off x="9189720" y="4133088"/>
+            <a:ext cx="2231136" cy="292608"/>
+          </a:xfrm>
+          <a:prstGeom prst="rect">
+            <a:avLst/>
+          </a:prstGeom>
+          <a:noFill/>
+          <a:ln/>
+        </p:spPr>
+        <p:txBody>
+          <a:bodyPr wrap="square" lIns="0" tIns="0" rIns="0" bIns="0" rtlCol="0" anchor="ctr"/>
+          <a:lstStyle/>
+          <a:p>
+            <a:pPr indent="0" marL="0">
+              <a:buNone/>
+            </a:pPr>
+            <a:r>
+              <a:rPr lang="en-US" sz="1050" b="1" dirty="0">
+                <a:solidFill>
+                  <a:srgbClr val="1B3A5C"/>
+                </a:solidFill>
+                <a:latin typeface="맑은 고딕" pitchFamily="34" charset="0"/>
+                <a:ea typeface="맑은 고딕" pitchFamily="34" charset="-122"/>
+                <a:cs typeface="맑은 고딕" pitchFamily="34" charset="-120"/>
+              </a:rPr>
+              <a:t>청소 주기 연장  </a:t>
+            </a:r>
+            <a:pPr indent="0" marL="0">
+              <a:buNone/>
+            </a:pPr>
+            <a:r>
+              <a:rPr lang="en-US" sz="900" dirty="0">
+                <a:solidFill>
+                  <a:srgbClr val="8A94A6"/>
+                </a:solidFill>
+                <a:latin typeface="맑은 고딕" pitchFamily="34" charset="0"/>
+                <a:ea typeface="맑은 고딕" pitchFamily="34" charset="-122"/>
+                <a:cs typeface="맑은 고딕" pitchFamily="34" charset="-120"/>
+              </a:rPr>
+              <a:t>계통 청결 유지</a:t>
+            </a:r>
+            <a:endParaRPr lang="en-US" sz="1050" dirty="0"/>
+          </a:p>
+        </p:txBody>
+      </p:sp>
+      <p:sp>
+        <p:nvSpPr>
+          <p:cNvPr id="42" name="Shape 40"/>
+          <p:cNvSpPr/>
+          <p:nvPr/>
+        </p:nvSpPr>
+        <p:spPr>
+          <a:xfrm>
+            <a:off x="6519672" y="4617720"/>
+            <a:ext cx="118872" cy="118872"/>
+          </a:xfrm>
+          <a:prstGeom prst="roundRect">
+            <a:avLst>
+              <a:gd name="adj" fmla="val 50000"/>
+            </a:avLst>
+          </a:prstGeom>
+          <a:solidFill>
+            <a:srgbClr val="2E7D5B"/>
+          </a:solidFill>
+          <a:ln w="12700">
+            <a:solidFill>
+              <a:srgbClr val="333333"/>
+            </a:solidFill>
+            <a:prstDash val="solid"/>
+          </a:ln>
+        </p:spPr>
+      </p:sp>
+      <p:sp>
+        <p:nvSpPr>
+          <p:cNvPr id="43" name="Text 41"/>
+          <p:cNvSpPr/>
+          <p:nvPr/>
+        </p:nvSpPr>
+        <p:spPr>
+          <a:xfrm>
+            <a:off x="6739128" y="4535424"/>
+            <a:ext cx="2231136" cy="292608"/>
+          </a:xfrm>
+          <a:prstGeom prst="rect">
+            <a:avLst/>
+          </a:prstGeom>
+          <a:noFill/>
+          <a:ln/>
+        </p:spPr>
+        <p:txBody>
+          <a:bodyPr wrap="square" lIns="0" tIns="0" rIns="0" bIns="0" rtlCol="0" anchor="ctr"/>
+          <a:lstStyle/>
+          <a:p>
+            <a:pPr indent="0" marL="0">
+              <a:buNone/>
+            </a:pPr>
+            <a:r>
+              <a:rPr lang="en-US" sz="1050" b="1" dirty="0">
+                <a:solidFill>
+                  <a:srgbClr val="1B3A5C"/>
+                </a:solidFill>
+                <a:latin typeface="맑은 고딕" pitchFamily="34" charset="0"/>
+                <a:ea typeface="맑은 고딕" pitchFamily="34" charset="-122"/>
+                <a:cs typeface="맑은 고딕" pitchFamily="34" charset="-120"/>
+              </a:rPr>
+              <a:t>CII 반영  </a:t>
+            </a:r>
+            <a:pPr indent="0" marL="0">
+              <a:buNone/>
+            </a:pPr>
+            <a:r>
+              <a:rPr lang="en-US" sz="900" dirty="0">
+                <a:solidFill>
+                  <a:srgbClr val="8A94A6"/>
+                </a:solidFill>
+                <a:latin typeface="맑은 고딕" pitchFamily="34" charset="0"/>
+                <a:ea typeface="맑은 고딕" pitchFamily="34" charset="-122"/>
+                <a:cs typeface="맑은 고딕" pitchFamily="34" charset="-120"/>
+              </a:rPr>
+              <a:t>문서화된 개선</a:t>
+            </a:r>
+            <a:endParaRPr lang="en-US" sz="1050" dirty="0"/>
+          </a:p>
+        </p:txBody>
+      </p:sp>
+      <p:sp>
+        <p:nvSpPr>
+          <p:cNvPr id="44" name="Shape 42"/>
+          <p:cNvSpPr/>
+          <p:nvPr/>
+        </p:nvSpPr>
+        <p:spPr>
+          <a:xfrm>
+            <a:off x="566928" y="5138928"/>
+            <a:ext cx="11057839" cy="786384"/>
+          </a:xfrm>
+          <a:prstGeom prst="roundRect">
+            <a:avLst>
+              <a:gd name="adj" fmla="val 11628"/>
+            </a:avLst>
+          </a:prstGeom>
+          <a:solidFill>
+            <a:srgbClr val="1B3A5C"/>
+          </a:solidFill>
+          <a:ln w="12700">
+            <a:solidFill>
+              <a:srgbClr val="1B3A5C"/>
+            </a:solidFill>
+            <a:prstDash val="solid"/>
+          </a:ln>
+        </p:spPr>
+      </p:sp>
+      <p:sp>
+        <p:nvSpPr>
+          <p:cNvPr id="45" name="Text 43"/>
+          <p:cNvSpPr/>
+          <p:nvPr/>
+        </p:nvSpPr>
+        <p:spPr>
+          <a:xfrm>
+            <a:off x="795528" y="5138928"/>
+            <a:ext cx="10600639" cy="786384"/>
+          </a:xfrm>
+          <a:prstGeom prst="rect">
+            <a:avLst/>
+          </a:prstGeom>
+          <a:noFill/>
+          <a:ln/>
+        </p:spPr>
+        <p:txBody>
+          <a:bodyPr wrap="square" lIns="0" tIns="0" rIns="0" bIns="0" rtlCol="0" anchor="ctr"/>
+          <a:lstStyle/>
+          <a:p>
+            <a:pPr algn="ctr" indent="0" marL="0">
+              <a:buNone/>
+            </a:pPr>
+            <a:r>
+              <a:rPr lang="en-US" sz="1700" b="1" dirty="0">
+                <a:solidFill>
+                  <a:srgbClr val="E17B34"/>
+                </a:solidFill>
+                <a:latin typeface="바탕" pitchFamily="34" charset="0"/>
+                <a:ea typeface="바탕" pitchFamily="34" charset="-122"/>
+                <a:cs typeface="바탕" pitchFamily="34" charset="-120"/>
+              </a:rPr>
+              <a:t>“ </a:t>
+            </a:r>
+            <a:pPr algn="ctr" indent="0" marL="0">
+              <a:buNone/>
+            </a:pPr>
+            <a:r>
+              <a:rPr lang="en-US" sz="1400" b="1" dirty="0">
+                <a:solidFill>
+                  <a:srgbClr val="FFFFFF"/>
+                </a:solidFill>
+                <a:latin typeface="맑은 고딕" pitchFamily="34" charset="0"/>
+                <a:ea typeface="맑은 고딕" pitchFamily="34" charset="-122"/>
+                <a:cs typeface="맑은 고딕" pitchFamily="34" charset="-120"/>
+              </a:rPr>
+              <a:t>목표는 벙커링한 모든 연료가 추진력으로 온전히 쓰일 기회를 갖게 하는 것입니다.</a:t>
+            </a:r>
+            <a:pPr algn="ctr" indent="0" marL="0">
+              <a:buNone/>
+            </a:pPr>
+            <a:r>
+              <a:rPr lang="en-US" sz="1700" b="1" dirty="0">
+                <a:solidFill>
+                  <a:srgbClr val="E17B34"/>
+                </a:solidFill>
+                <a:latin typeface="바탕" pitchFamily="34" charset="0"/>
+                <a:ea typeface="바탕" pitchFamily="34" charset="-122"/>
+                <a:cs typeface="바탕" pitchFamily="34" charset="-120"/>
+              </a:rPr>
+              <a:t> ”</a:t>
+            </a:r>
+            <a:endParaRPr lang="en-US" sz="1700" dirty="0"/>
+          </a:p>
+        </p:txBody>
+      </p:sp>
+      <p:sp>
+        <p:nvSpPr>
+          <p:cNvPr id="46" name="Text 44"/>
+          <p:cNvSpPr/>
+          <p:nvPr/>
+        </p:nvSpPr>
+        <p:spPr>
+          <a:xfrm>
+            <a:off x="566928" y="6053328"/>
+            <a:ext cx="11057839" cy="219456"/>
+          </a:xfrm>
+          <a:prstGeom prst="rect">
+            <a:avLst/>
+          </a:prstGeom>
+          <a:noFill/>
+          <a:ln/>
+        </p:spPr>
+        <p:txBody>
+          <a:bodyPr wrap="square" lIns="0" tIns="0" rIns="0" bIns="0" rtlCol="0" anchor="ctr"/>
+          <a:lstStyle/>
+          <a:p>
+            <a:pPr indent="0" marL="0">
+              <a:buNone/>
+            </a:pPr>
+            <a:r>
+              <a:rPr lang="en-US" sz="850" i="1" dirty="0">
+                <a:solidFill>
+                  <a:srgbClr val="8A94A6"/>
+                </a:solidFill>
+                <a:latin typeface="맑은 고딕" pitchFamily="34" charset="0"/>
+                <a:ea typeface="맑은 고딕" pitchFamily="34" charset="-122"/>
+                <a:cs typeface="맑은 고딕" pitchFamily="34" charset="-120"/>
+              </a:rPr>
+              <a:t>출처: Wilhelmsen Ships Service, Tank to Wake 및 Pre-combustion treatment 자료 · Section 01 실측 데이터</a:t>
+            </a:r>
+            <a:endParaRPr lang="en-US" sz="850" dirty="0"/>
           </a:p>
         </p:txBody>
       </p:sp>
@@ -13031,7 +16720,7 @@
                 <a:ea typeface="맑은 고딕" pitchFamily="34" charset="-122"/>
                 <a:cs typeface="맑은 고딕" pitchFamily="34" charset="-120"/>
               </a:rPr>
-              <a:t>MGO 공급이 늘었다고 안심할 수 없습니다. 인화점 미달은 품질 문제가 아니라 안전 문제입니다.</a:t>
+              <a:t>ECA 출입 시 연료 전환은 점도와 온도를 급격히 흔듭니다. 그만큼 계통이 예민해집니다.</a:t>
             </a:r>
             <a:pPr algn="ctr" indent="0" marL="0">
               <a:buNone/>
@@ -14222,7 +17911,7 @@
                 <a:ea typeface="맑은 고딕" pitchFamily="34" charset="-122"/>
                 <a:cs typeface="맑은 고딕" pitchFamily="34" charset="-120"/>
               </a:rPr>
-              <a:t>→ Section 02 에서 다룹니다</a:t>
+              <a:t>→ 관리 범위를 분리기 밖으로 넓혀야 합니다</a:t>
             </a:r>
             <a:endParaRPr lang="en-US" sz="1050" dirty="0"/>
           </a:p>
